--- a/Linux_Mission_Critical_Air_Gapped_Hardening_Final.pptx
+++ b/Linux_Mission_Critical_Air_Gapped_Hardening_Final.pptx
@@ -5,7 +5,7 @@
     <p:sldMasterId id="2147483648" r:id="rId1"/>
   </p:sldMasterIdLst>
   <p:notesMasterIdLst>
-    <p:notesMasterId r:id="rId47"/>
+    <p:notesMasterId r:id="rId48"/>
   </p:notesMasterIdLst>
   <p:sldIdLst>
     <p:sldId id="256" r:id="rId2"/>
@@ -50,9 +50,10 @@
     <p:sldId id="295" r:id="rId41"/>
     <p:sldId id="296" r:id="rId42"/>
     <p:sldId id="297" r:id="rId43"/>
-    <p:sldId id="298" r:id="rId44"/>
-    <p:sldId id="299" r:id="rId45"/>
-    <p:sldId id="300" r:id="rId46"/>
+    <p:sldId id="301" r:id="rId44"/>
+    <p:sldId id="298" r:id="rId45"/>
+    <p:sldId id="299" r:id="rId46"/>
+    <p:sldId id="300" r:id="rId47"/>
   </p:sldIdLst>
   <p:sldSz cx="12192000" cy="6858000"/>
   <p:notesSz cx="6858000" cy="12192000"/>
@@ -181,7 +182,7 @@
     </p:spTree>
     <p:extLst>
       <p:ext uri="{BB962C8B-B14F-4D97-AF65-F5344CB8AC3E}">
-        <p14:creationId xmlns:p14="http://schemas.microsoft.com/office/powerpoint/2010/main" val="1667357802"/>
+        <p14:creationId xmlns:p14="http://schemas.microsoft.com/office/powerpoint/2010/main" val="2798802573"/>
       </p:ext>
     </p:extLst>
   </p:cSld>
@@ -3152,13 +3153,57 @@
           <a:p>
             <a:pPr rtl="1"/>
             <a:r>
-              <a:t>המלצת סיום: baseline קטן, חתום, מדוד, מינימום, ניתן לביקורת ולשחזור.</a:t>
+              <a:rPr lang="he-IL"/>
+              <a:t>שקופית הרחבה — דפוס מכשיר (Appliance) ב‑LXC/nspawn ללא בניית images.</a:t>
             </a:r>
           </a:p>
           <a:p>
             <a:pPr rtl="1"/>
             <a:r>
-              <a:t>תפעול: imports מבוקרים, שערי ביצועים, ראיות, rollback מבוסס‑בדיקות, waivers בעלי תוקף.</a:t>
+              <a:rPr lang="he-IL"/>
+              <a:t>רעיון: המארח חשוף — רק systemd, sshd, auditd, chrony ומנהל קונטיינרים. כל עומס משימה וכל סשן מפעיל רץ בתוך קונטיינר כברירת מחדל.</a:t>
+            </a:r>
+          </a:p>
+          <a:p>
+            <a:pPr rtl="1"/>
+            <a:r>
+              <a:rPr lang="he-IL"/>
+              <a:t>ה‑rootfs של הקונטיינר הוא ספריית קבצים (debootstrap / dnf --installroot) או tar חתום שעובר דרך תחנת ה‑intake (M28). אין registry, אין docker build, אין OCI.</a:t>
+            </a:r>
+          </a:p>
+          <a:p>
+            <a:pPr rtl="1"/>
+            <a:r>
+              <a:rPr lang="he-IL"/>
+              <a:t>כללי קונפיגורציה היחידים שמאושרים: unprivileged + idmap, AppArmor + seccomp, cap-drop אגרסיבי, cgroup limits. כל סטייה (privileged container) דורשת waiver לפי M32.</a:t>
+            </a:r>
+          </a:p>
+          <a:p>
+            <a:pPr rtl="1"/>
+            <a:r>
+              <a:rPr lang="he-IL"/>
+              <a:t>כניסת מפעילים: sshd Match/ForceCommand → nsenter/lxc-attach. למארח אין shell חוקי לפי תפקיד.</a:t>
+            </a:r>
+          </a:p>
+          <a:p>
+            <a:pPr rtl="1"/>
+            <a:r>
+              <a:rPr lang="he-IL"/>
+              <a:t>מגבלה מהותית: kernel משותף — CVE קרנל חוצה גבול. לעומסים בעלי דרישת assurance גבוהה, להוסיף שכבה (Kata/gVisor או KVM) מתחת ל‑LXC.</a:t>
+            </a:r>
+          </a:p>
+          <a:p>
+            <a:pPr rtl="1"/>
+            <a:r>
+              <a:rPr lang="he-IL"/>
+              <a:t>השתלבות בדק: מצרף את M11+M25 לתבנית הפעלה אחת; משתלב עם M14 (read‑only root + dm-verity) ועם M16/M28/M30 (אספקה חתומה אופליין).</a:t>
+            </a:r>
+          </a:p>
+          <a:p>
+            <a:pPr rtl="1"/>
+            <a:r>
+              <a:rPr lang="he-IL"/>
+              <a:t>ולידציה: lxc-checkconfig, systemd-analyze security, /proc/&lt;pid&gt;/uid_map, ניסיון לקבל shell על המארח מחשבון מפעיל — חייב להיכשל.</a:t>
             </a:r>
           </a:p>
         </p:txBody>
@@ -3229,7 +3274,13 @@
           <a:p>
             <a:pPr rtl="1"/>
             <a:r>
-              <a:t>מילון מונחים — הרחבות קומפקטיות (AIDE, BPF, FIM, IOMMU, KSPP, LUKS2, MAC, MOK, PAM, PCR, PTP, SBOM, TPM, UEFI, WORM).</a:t>
+              <a:t>המלצת סיום: baseline קטן, חתום, מדוד, מינימום, ניתן לביקורת ולשחזור.</a:t>
+            </a:r>
+          </a:p>
+          <a:p>
+            <a:pPr rtl="1"/>
+            <a:r>
+              <a:t>תפעול: imports מבוקרים, שערי ביצועים, ראיות, rollback מבוסס‑בדיקות, waivers בעלי תוקף.</a:t>
             </a:r>
           </a:p>
         </p:txBody>
@@ -3255,6 +3306,77 @@
 </file>
 
 <file path=ppt/notesSlides/notesSlide45.xml><?xml version="1.0" encoding="utf-8"?>
+<p:notes xmlns:a="http://schemas.openxmlformats.org/drawingml/2006/main" xmlns:r="http://schemas.openxmlformats.org/officeDocument/2006/relationships" xmlns:p="http://schemas.openxmlformats.org/presentationml/2006/main">
+  <p:cSld>
+    <p:spTree>
+      <p:nvGrpSpPr>
+        <p:cNvPr id="1" name=""/>
+        <p:cNvGrpSpPr/>
+        <p:nvPr/>
+      </p:nvGrpSpPr>
+      <p:grpSpPr>
+        <a:xfrm>
+          <a:off x="0" y="0"/>
+          <a:ext cx="0" cy="0"/>
+          <a:chOff x="0" y="0"/>
+          <a:chExt cx="0" cy="0"/>
+        </a:xfrm>
+      </p:grpSpPr>
+      <p:sp>
+        <p:nvSpPr>
+          <p:cNvPr id="2" name="Slide Image Placeholder 1"/>
+          <p:cNvSpPr>
+            <a:spLocks noGrp="1" noRot="1" noChangeAspect="1"/>
+          </p:cNvSpPr>
+          <p:nvPr>
+            <p:ph type="sldImg" idx="2"/>
+          </p:nvPr>
+        </p:nvSpPr>
+        <p:spPr/>
+      </p:sp>
+      <p:sp>
+        <p:nvSpPr>
+          <p:cNvPr id="3" name="Notes Placeholder 2"/>
+          <p:cNvSpPr>
+            <a:spLocks noGrp="1"/>
+          </p:cNvSpPr>
+          <p:nvPr>
+            <p:ph type="body" sz="quarter" idx="3"/>
+          </p:nvPr>
+        </p:nvSpPr>
+        <p:spPr/>
+        <p:txBody>
+          <a:bodyPr/>
+          <a:lstStyle/>
+          <a:p>
+            <a:pPr rtl="1"/>
+            <a:r>
+              <a:t>מילון מונחים — הרחבות קומפקטיות (AIDE, BPF, FIM, IOMMU, KSPP, LUKS2, MAC, MOK, PAM, PCR, PTP, SBOM, TPM, UEFI, WORM).</a:t>
+            </a:r>
+          </a:p>
+        </p:txBody>
+      </p:sp>
+      <p:sp>
+        <p:nvSpPr>
+          <p:cNvPr id="4" name="Slide Number Placeholder 3"/>
+          <p:cNvSpPr>
+            <a:spLocks noGrp="1"/>
+          </p:cNvSpPr>
+          <p:nvPr>
+            <p:ph type="sldNum" sz="quarter" idx="5"/>
+          </p:nvPr>
+        </p:nvSpPr>
+        <p:spPr/>
+      </p:sp>
+    </p:spTree>
+  </p:cSld>
+  <p:clrMapOvr>
+    <a:masterClrMapping/>
+  </p:clrMapOvr>
+</p:notes>
+</file>
+
+<file path=ppt/notesSlides/notesSlide46.xml><?xml version="1.0" encoding="utf-8"?>
 <p:notes xmlns:a="http://schemas.openxmlformats.org/drawingml/2006/main" xmlns:r="http://schemas.openxmlformats.org/officeDocument/2006/relationships" xmlns:p="http://schemas.openxmlformats.org/presentationml/2006/main">
   <p:cSld>
     <p:spTree>
@@ -5013,6 +5135,29 @@
       </p:sp>
       <p:sp>
         <p:nvSpPr>
+          <p:cNvPr id="9" name="Shape 7"/>
+          <p:cNvSpPr/>
+          <p:nvPr/>
+        </p:nvSpPr>
+        <p:spPr>
+          <a:xfrm>
+            <a:off x="4023360" y="1828800"/>
+            <a:ext cx="4114800" cy="2926080"/>
+          </a:xfrm>
+          <a:prstGeom prst="arc">
+            <a:avLst/>
+          </a:prstGeom>
+          <a:noFill/>
+          <a:ln w="15240">
+            <a:solidFill>
+              <a:srgbClr val="CBD5E1"/>
+            </a:solidFill>
+            <a:prstDash val="solid"/>
+          </a:ln>
+        </p:spPr>
+      </p:sp>
+      <p:sp>
+        <p:nvSpPr>
           <p:cNvPr id="10" name="Shape 8"/>
           <p:cNvSpPr/>
           <p:nvPr/>
@@ -5141,6 +5286,29 @@
       </p:sp>
       <p:sp>
         <p:nvSpPr>
+          <p:cNvPr id="14" name="Shape 12"/>
+          <p:cNvSpPr/>
+          <p:nvPr/>
+        </p:nvSpPr>
+        <p:spPr>
+          <a:xfrm>
+            <a:off x="4023360" y="1828800"/>
+            <a:ext cx="4114800" cy="2926080"/>
+          </a:xfrm>
+          <a:prstGeom prst="arc">
+            <a:avLst/>
+          </a:prstGeom>
+          <a:noFill/>
+          <a:ln w="15240">
+            <a:solidFill>
+              <a:srgbClr val="CBD5E1"/>
+            </a:solidFill>
+            <a:prstDash val="solid"/>
+          </a:ln>
+        </p:spPr>
+      </p:sp>
+      <p:sp>
+        <p:nvSpPr>
           <p:cNvPr id="15" name="Shape 13"/>
           <p:cNvSpPr/>
           <p:nvPr/>
@@ -5269,6 +5437,29 @@
       </p:sp>
       <p:sp>
         <p:nvSpPr>
+          <p:cNvPr id="19" name="Shape 17"/>
+          <p:cNvSpPr/>
+          <p:nvPr/>
+        </p:nvSpPr>
+        <p:spPr>
+          <a:xfrm>
+            <a:off x="4023360" y="1828800"/>
+            <a:ext cx="4114800" cy="2926080"/>
+          </a:xfrm>
+          <a:prstGeom prst="arc">
+            <a:avLst/>
+          </a:prstGeom>
+          <a:noFill/>
+          <a:ln w="15240">
+            <a:solidFill>
+              <a:srgbClr val="CBD5E1"/>
+            </a:solidFill>
+            <a:prstDash val="solid"/>
+          </a:ln>
+        </p:spPr>
+      </p:sp>
+      <p:sp>
+        <p:nvSpPr>
           <p:cNvPr id="20" name="Shape 18"/>
           <p:cNvSpPr/>
           <p:nvPr/>
@@ -5397,6 +5588,29 @@
       </p:sp>
       <p:sp>
         <p:nvSpPr>
+          <p:cNvPr id="24" name="Shape 22"/>
+          <p:cNvSpPr/>
+          <p:nvPr/>
+        </p:nvSpPr>
+        <p:spPr>
+          <a:xfrm>
+            <a:off x="4023360" y="1828800"/>
+            <a:ext cx="4114800" cy="2926080"/>
+          </a:xfrm>
+          <a:prstGeom prst="arc">
+            <a:avLst/>
+          </a:prstGeom>
+          <a:noFill/>
+          <a:ln w="15240">
+            <a:solidFill>
+              <a:srgbClr val="CBD5E1"/>
+            </a:solidFill>
+            <a:prstDash val="solid"/>
+          </a:ln>
+        </p:spPr>
+      </p:sp>
+      <p:sp>
+        <p:nvSpPr>
           <p:cNvPr id="25" name="Shape 23"/>
           <p:cNvSpPr/>
           <p:nvPr/>
@@ -5522,6 +5736,29 @@
             <a:endParaRPr lang="en-US" sz="1200" dirty="0"/>
           </a:p>
         </p:txBody>
+      </p:sp>
+      <p:sp>
+        <p:nvSpPr>
+          <p:cNvPr id="29" name="Shape 27"/>
+          <p:cNvSpPr/>
+          <p:nvPr/>
+        </p:nvSpPr>
+        <p:spPr>
+          <a:xfrm>
+            <a:off x="4023360" y="1828800"/>
+            <a:ext cx="4114800" cy="2926080"/>
+          </a:xfrm>
+          <a:prstGeom prst="arc">
+            <a:avLst/>
+          </a:prstGeom>
+          <a:noFill/>
+          <a:ln w="15240">
+            <a:solidFill>
+              <a:srgbClr val="CBD5E1"/>
+            </a:solidFill>
+            <a:prstDash val="solid"/>
+          </a:ln>
+        </p:spPr>
       </p:sp>
       <p:sp>
         <p:nvSpPr>
@@ -6273,9 +6510,8 @@
                   <a:srgbClr val="172033"/>
                 </a:solidFill>
               </a:rPr>
-              <a:t>- Lock boot order and disable removable or network boot unless explicitly required.</a:t>
-            </a:r>
-            <a:endParaRPr lang="en-US" sz="1200" dirty="0"/>
+              <a:t>- BIOS: set Setup/Admin password (escrowed); disable USB/PXE/network boot; lock boot order.</a:t>
+            </a:r>
           </a:p>
           <a:p>
             <a:pPr marL="0" indent="0">
@@ -6287,9 +6523,8 @@
                   <a:srgbClr val="172033"/>
                 </a:solidFill>
               </a:rPr>
-              <a:t>- Set UEFI administrator password under controlled escrow.</a:t>
-            </a:r>
-            <a:endParaRPr lang="en-US" sz="1200" dirty="0"/>
+              <a:t>- Disable WiFi/BT/camera/Thunderbolt/serial-console-debug at firmware level.</a:t>
+            </a:r>
           </a:p>
           <a:p>
             <a:pPr marL="0" indent="0">
@@ -6301,9 +6536,8 @@
                   <a:srgbClr val="172033"/>
                 </a:solidFill>
               </a:rPr>
-              <a:t>- Disable unused controllers such as Wi-Fi, Bluetooth, cameras, Thunderbolt, PXE, and debug ports.</a:t>
-            </a:r>
-            <a:endParaRPr lang="en-US" sz="1200" dirty="0"/>
+              <a:t>- Enable VT-x/VT-d (or AMD-V/AMD-Vi); disable Intel ME network features where supported.</a:t>
+            </a:r>
           </a:p>
           <a:p>
             <a:pPr marL="0" indent="0">
@@ -6315,9 +6549,21 @@
                   <a:srgbClr val="172033"/>
                 </a:solidFill>
               </a:rPr>
-              <a:t>- Record firmware version, boot mode, device state, and platform identifiers in the baseline.</a:t>
-            </a:r>
-            <a:endParaRPr lang="en-US" sz="1200" dirty="0"/>
+              <a:t>- Record per-host: vendor, model, BIOS rev, microcode, serial, SMBIOS UUID into baseline.</a:t>
+            </a:r>
+          </a:p>
+          <a:p>
+            <a:pPr marL="0" indent="0">
+              <a:buNone/>
+            </a:pPr>
+            <a:r>
+              <a:rPr lang="en-US" sz="1200" dirty="0">
+                <a:solidFill>
+                  <a:srgbClr val="172033"/>
+                </a:solidFill>
+              </a:rPr>
+              <a:t>- Tooling: `dmidecode -t bios,system,baseboard`, `fwupdmgr get-devices`, `lshw -class system`.</a:t>
+            </a:r>
           </a:p>
         </p:txBody>
       </p:sp>
@@ -6764,9 +7010,8 @@
                   <a:srgbClr val="FFFFFF"/>
                 </a:solidFill>
               </a:rPr>
-              <a:t>Validation: Inspect UEFI settings, verify Secure Boot-capable UEFI mode, compare firmware versions to baseline, and confirm boot order.</a:t>
-            </a:r>
-            <a:endParaRPr lang="en-US" sz="1200" dirty="0"/>
+              <a:t>Validation: `dmidecode -s bios-version` matches baseline; `mokutil --sb-state`=enabled; `cat /sys/firmware/efi/fw_platform_size`=64; boot order frozen.</a:t>
+            </a:r>
           </a:p>
         </p:txBody>
       </p:sp>
@@ -7443,9 +7688,8 @@
                   <a:srgbClr val="172033"/>
                 </a:solidFill>
               </a:rPr>
-              <a:t>- Disable legacy BIOS/CSM boot and unnecessary option ROMs.</a:t>
-            </a:r>
-            <a:endParaRPr lang="en-US" sz="1200" dirty="0"/>
+              <a:t>- Kernel cmdline: `intel_iommu=on iommu=pt` (or `amd_iommu=on iommu=pt`) + `kernel.unprivileged_userns_clone=0`.</a:t>
+            </a:r>
           </a:p>
           <a:p>
             <a:pPr marL="0" indent="0">
@@ -7457,9 +7701,8 @@
                   <a:srgbClr val="172033"/>
                 </a:solidFill>
               </a:rPr>
-              <a:t>- Enable IOMMU/VT-d/AMD-Vi where workload testing allows.</a:t>
-            </a:r>
-            <a:endParaRPr lang="en-US" sz="1200" dirty="0"/>
+              <a:t>- Disable CSM/Legacy boot; require UEFI-only; disable option ROMs for unused PCIe slots.</a:t>
+            </a:r>
           </a:p>
           <a:p>
             <a:pPr marL="0" indent="0">
@@ -7471,9 +7714,8 @@
                   <a:srgbClr val="172033"/>
                 </a:solidFill>
               </a:rPr>
-              <a:t>- Configure TPM ownership protections and prevent unauthorized clear operations.</a:t>
-            </a:r>
-            <a:endParaRPr lang="en-US" sz="1200" dirty="0"/>
+              <a:t>- TPM: `tpm2_changeauth -c owner` (escrowed); set `physicalPresence=false` to block clear.</a:t>
+            </a:r>
           </a:p>
           <a:p>
             <a:pPr marL="0" indent="0">
@@ -7485,9 +7727,21 @@
                   <a:srgbClr val="172033"/>
                 </a:solidFill>
               </a:rPr>
-              <a:t>- Export or document firmware settings per hardware model.</a:t>
-            </a:r>
-            <a:endParaRPr lang="en-US" sz="1200" dirty="0"/>
+              <a:t>- Block firmware downgrade via vendor tooling (HPE iLO `Server Security`, Dell DUP signature checks).</a:t>
+            </a:r>
+          </a:p>
+          <a:p>
+            <a:pPr marL="0" indent="0">
+              <a:buNone/>
+            </a:pPr>
+            <a:r>
+              <a:rPr lang="en-US" sz="1200" dirty="0">
+                <a:solidFill>
+                  <a:srgbClr val="172033"/>
+                </a:solidFill>
+              </a:rPr>
+              <a:t>- Capture firmware profile: `fwupdmgr get-devices --json &gt; /var/lib/baseline/fwup.json`.</a:t>
+            </a:r>
           </a:p>
         </p:txBody>
       </p:sp>
@@ -7934,9 +8188,8 @@
                   <a:srgbClr val="FFFFFF"/>
                 </a:solidFill>
               </a:rPr>
-              <a:t>Validation: Check kernel logs for IOMMU, verify UEFI-only boot, inspect TPM state, and compare exported firmware profile.</a:t>
-            </a:r>
-            <a:endParaRPr lang="en-US" sz="1200" dirty="0"/>
+              <a:t>Validation: `dmesg | grep -i 'IOMMU enabled'`; `tpm2_getcap properties-fixed` shows owner-auth-set; `efibootmgr -v` lists only signed entries.</a:t>
+            </a:r>
           </a:p>
         </p:txBody>
       </p:sp>
@@ -8613,9 +8866,8 @@
                   <a:srgbClr val="172033"/>
                 </a:solidFill>
               </a:rPr>
-              <a:t>- Enable UEFI Secure Boot.</a:t>
-            </a:r>
-            <a:endParaRPr lang="en-US" sz="1200" dirty="0"/>
+              <a:t>- Generate org keys: `openssl req -new -x509 -newkey rsa:4096 -keyout PK.key -out PK.crt -days 3650`.</a:t>
+            </a:r>
           </a:p>
           <a:p>
             <a:pPr marL="0" indent="0">
@@ -8627,9 +8879,8 @@
                   <a:srgbClr val="172033"/>
                 </a:solidFill>
               </a:rPr>
-              <a:t>- Prefer organization-controlled Secure Boot keys where feasible.</a:t>
-            </a:r>
-            <a:endParaRPr lang="en-US" sz="1200" dirty="0"/>
+              <a:t>- Enroll PK/KEK/db via `efi-updatevar -f PK.auth PK` after clearing factory keys.</a:t>
+            </a:r>
           </a:p>
           <a:p>
             <a:pPr marL="0" indent="0">
@@ -8641,9 +8892,8 @@
                   <a:srgbClr val="172033"/>
                 </a:solidFill>
               </a:rPr>
-              <a:t>- Sign bootloader, kernel, and required kernel modules.</a:t>
-            </a:r>
-            <a:endParaRPr lang="en-US" sz="1200" dirty="0"/>
+              <a:t>- Sign kernel: `sbsign --key db.key --cert db.crt --output vmlinuz.signed vmlinuz`.</a:t>
+            </a:r>
           </a:p>
           <a:p>
             <a:pPr marL="0" indent="0">
@@ -8655,9 +8905,21 @@
                   <a:srgbClr val="172033"/>
                 </a:solidFill>
               </a:rPr>
-              <a:t>- Use MOK/shim only with strict key enrollment governance.</a:t>
-            </a:r>
-            <a:endParaRPr lang="en-US" sz="1200" dirty="0"/>
+              <a:t>- Sign modules at build (`scripts/sign-file sha256 ...`); enforce via `module.sig_enforce=1`.</a:t>
+            </a:r>
+          </a:p>
+          <a:p>
+            <a:pPr marL="0" indent="0">
+              <a:buNone/>
+            </a:pPr>
+            <a:r>
+              <a:rPr lang="en-US" sz="1200" dirty="0">
+                <a:solidFill>
+                  <a:srgbClr val="172033"/>
+                </a:solidFill>
+              </a:rPr>
+              <a:t>- Keep signing offline (HSM or air-gapped CA); never ship signing key on production node.</a:t>
+            </a:r>
           </a:p>
         </p:txBody>
       </p:sp>
@@ -9104,9 +9366,8 @@
                   <a:srgbClr val="FFFFFF"/>
                 </a:solidFill>
               </a:rPr>
-              <a:t>Validation: Run `mokutil --sb-state`, inspect enrolled keys, confirm lockdown state, and attempt unsigned module load in staging.</a:t>
-            </a:r>
-            <a:endParaRPr lang="en-US" sz="1200" dirty="0"/>
+              <a:t>Validation: `mokutil --sb-state` = SecureBoot enabled; `dmesg | grep 'Loading X.509'` shows only enrolled CAs; `insmod unsigned.ko` returns -EKEYREJECTED.</a:t>
+            </a:r>
           </a:p>
         </p:txBody>
       </p:sp>
@@ -9783,9 +10044,8 @@
                   <a:srgbClr val="172033"/>
                 </a:solidFill>
               </a:rPr>
-              <a:t>- Use TPM 2.0 and measure boot components into PCRs.</a:t>
-            </a:r>
-            <a:endParaRPr lang="en-US" sz="1200" dirty="0"/>
+              <a:t>- Read PCRs: `tpm2_pcrread sha256:0,1,2,3,4,5,7,8,9,11,14`; capture golden values per platform.</a:t>
+            </a:r>
           </a:p>
           <a:p>
             <a:pPr marL="0" indent="0">
@@ -9797,9 +10057,8 @@
                   <a:srgbClr val="172033"/>
                 </a:solidFill>
               </a:rPr>
-              <a:t>- Store golden PCR profiles for approved configurations.</a:t>
-            </a:r>
-            <a:endParaRPr lang="en-US" sz="1200" dirty="0"/>
+              <a:t>- Persist event log: `cat /sys/kernel/security/tpm0/binary_bios_measurements &gt; evt.bin`.</a:t>
+            </a:r>
           </a:p>
           <a:p>
             <a:pPr marL="0" indent="0">
@@ -9811,9 +10070,8 @@
                   <a:srgbClr val="172033"/>
                 </a:solidFill>
               </a:rPr>
-              <a:t>- Export TPM event logs to a trusted offline analysis workstation.</a:t>
-            </a:r>
-            <a:endParaRPr lang="en-US" sz="1200" dirty="0"/>
+              <a:t>- Seal secrets to PCRs 0,2,4,7,11: `clevis encrypt tpm2 '{"pcr_ids":"0,2,4,7,11"}'`.</a:t>
+            </a:r>
           </a:p>
           <a:p>
             <a:pPr marL="0" indent="0">
@@ -9825,9 +10083,21 @@
                   <a:srgbClr val="172033"/>
                 </a:solidFill>
               </a:rPr>
-              <a:t>- Bind secrets to PCRs only after maintenance workflows are validated.</a:t>
-            </a:r>
-            <a:endParaRPr lang="en-US" sz="1200" dirty="0"/>
+              <a:t>- Bind LUKS unlock to TPM only after 30-day measured-boot stability run.</a:t>
+            </a:r>
+          </a:p>
+          <a:p>
+            <a:pPr marL="0" indent="0">
+              <a:buNone/>
+            </a:pPr>
+            <a:r>
+              <a:rPr lang="en-US" sz="1200" dirty="0">
+                <a:solidFill>
+                  <a:srgbClr val="172033"/>
+                </a:solidFill>
+              </a:rPr>
+              <a:t>- Local attestation only - no remote/cloud (`tpm2_quote` -&gt; internal verifier).</a:t>
+            </a:r>
           </a:p>
         </p:txBody>
       </p:sp>
@@ -10274,9 +10544,8 @@
                   <a:srgbClr val="FFFFFF"/>
                 </a:solidFill>
               </a:rPr>
-              <a:t>Validation: Use `tpm2_pcrread`, parse TPM event logs, and compare PCRs to approved maintenance baselines.</a:t>
-            </a:r>
-            <a:endParaRPr lang="en-US" sz="1200" dirty="0"/>
+              <a:t>Validation: `tpm2_pcrread sha256:7` matches golden; `tpm2_eventlog evt.bin | grep -c MeasuredBoot`; tampered initramfs causes PCR mismatch and seal failure.</a:t>
+            </a:r>
           </a:p>
         </p:txBody>
       </p:sp>
@@ -10953,9 +11222,8 @@
                   <a:srgbClr val="172033"/>
                 </a:solidFill>
               </a:rPr>
-              <a:t>- Use vendor-supported LTS or enterprise kernels.</a:t>
-            </a:r>
-            <a:endParaRPr lang="en-US" sz="1200" dirty="0"/>
+              <a:t>- Pin to vendor LTS (RHEL 9 kernel-core, Ubuntu HWE, Debian backports kernel).</a:t>
+            </a:r>
           </a:p>
           <a:p>
             <a:pPr marL="0" indent="0">
@@ -10967,9 +11235,8 @@
                   <a:srgbClr val="172033"/>
                 </a:solidFill>
               </a:rPr>
-              <a:t>- Enable KASLR, SMEP/SMAP, hardened usercopy, stack protector, and relevant CPU mitigations.</a:t>
-            </a:r>
-            <a:endParaRPr lang="en-US" sz="1200" dirty="0"/>
+              <a:t>- Cmdline: `mitigations=auto,nosmt init_on_alloc=1 init_on_free=1 slab_nomerge page_alloc.shuffle=1 vsyscall=none kernel.unprivileged_bpf_disabled=1`.</a:t>
+            </a:r>
           </a:p>
           <a:p>
             <a:pPr marL="0" indent="0">
@@ -10981,9 +11248,8 @@
                   <a:srgbClr val="172033"/>
                 </a:solidFill>
               </a:rPr>
-              <a:t>- Disable unneeded filesystems, protocols, drivers, debugfs, kexec, and unrestricted ptrace/perf.</a:t>
-            </a:r>
-            <a:endParaRPr lang="en-US" sz="1200" dirty="0"/>
+              <a:t>- Disable: `dccp,sctp,tipc,rds,n-hdlc,ax25,netrom,x25,rose,decnet,econet,af_802154,ipx,appletalk,psnap,p8023,p8022,can,atm` via `/etc/modprobe.d/blacklist-rare.conf`.</a:t>
+            </a:r>
           </a:p>
           <a:p>
             <a:pPr marL="0" indent="0">
@@ -10995,9 +11261,21 @@
                   <a:srgbClr val="172033"/>
                 </a:solidFill>
               </a:rPr>
-              <a:t>- Restrict eBPF and kernel pointer exposure.</a:t>
-            </a:r>
-            <a:endParaRPr lang="en-US" sz="1200" dirty="0"/>
+              <a:t>- Strip debug paths: remove `kgdb`, disable `CONFIG_DEBUG_FS`, set `kernel.kexec_load_disabled=1`.</a:t>
+            </a:r>
+          </a:p>
+          <a:p>
+            <a:pPr marL="0" indent="0">
+              <a:buNone/>
+            </a:pPr>
+            <a:r>
+              <a:rPr lang="en-US" sz="1200" dirty="0">
+                <a:solidFill>
+                  <a:srgbClr val="172033"/>
+                </a:solidFill>
+              </a:rPr>
+              <a:t>- Enable `lockdown=confidentiality` (kernel &gt;= 5.4) when SecureBoot active.</a:t>
+            </a:r>
           </a:p>
         </p:txBody>
       </p:sp>
@@ -11444,9 +11722,8 @@
                   <a:srgbClr val="FFFFFF"/>
                 </a:solidFill>
               </a:rPr>
-              <a:t>Validation: Inspect `/boot/config-*`, `sysctl -a`, CPU vulnerability files, and run before/after workload benchmarks.</a:t>
-            </a:r>
-            <a:endParaRPr lang="en-US" sz="1200" dirty="0"/>
+              <a:t>Validation: `cat /sys/kernel/security/lockdown` shows `[confidentiality]`; `cat /sys/devices/system/cpu/vulnerabilities/*` all `Mitigation` or `Not affected`; `sysctl kernel.unprivileged_bpf_disabled`=1.</a:t>
+            </a:r>
           </a:p>
         </p:txBody>
       </p:sp>
@@ -12123,9 +12400,8 @@
                   <a:srgbClr val="172033"/>
                 </a:solidFill>
               </a:rPr>
-              <a:t>- Enforce signed modules through Secure Boot/module signature policy.</a:t>
-            </a:r>
-            <a:endParaRPr lang="en-US" sz="1200" dirty="0"/>
+              <a:t>- Cmdline: `module.sig_enforce=1 lockdown=integrity` (&gt;=5.4 kernel).</a:t>
+            </a:r>
           </a:p>
           <a:p>
             <a:pPr marL="0" indent="0">
@@ -12137,9 +12413,8 @@
                   <a:srgbClr val="172033"/>
                 </a:solidFill>
               </a:rPr>
-              <a:t>- Maintain an approved module inventory.</a:t>
-            </a:r>
-            <a:endParaRPr lang="en-US" sz="1200" dirty="0"/>
+              <a:t>- Generate approved list: `lsmod | awk 'NR&gt;1{print $1}' | sort &gt; /etc/modules-allowed`; review weekly.</a:t>
+            </a:r>
           </a:p>
           <a:p>
             <a:pPr marL="0" indent="0">
@@ -12151,9 +12426,8 @@
                   <a:srgbClr val="172033"/>
                 </a:solidFill>
               </a:rPr>
-              <a:t>- Blacklist unused modules and remove unused module packages.</a:t>
-            </a:r>
-            <a:endParaRPr lang="en-US" sz="1200" dirty="0"/>
+              <a:t>- Blacklist: `install &lt;name&gt; /bin/false` in `/etc/modprobe.d/disabled-&lt;name&gt;.conf` (cannot be overridden by `modprobe`).</a:t>
+            </a:r>
           </a:p>
           <a:p>
             <a:pPr marL="0" indent="0">
@@ -12165,9 +12439,21 @@
                   <a:srgbClr val="172033"/>
                 </a:solidFill>
               </a:rPr>
-              <a:t>- Set `kernel.modules_disabled=1` after boot when late module loading is not required.</a:t>
-            </a:r>
-            <a:endParaRPr lang="en-US" sz="1200" dirty="0"/>
+              <a:t>- Lock module loading post-boot: `sysctl -w kernel.modules_disabled=1` after `multi-user.target`.</a:t>
+            </a:r>
+          </a:p>
+          <a:p>
+            <a:pPr marL="0" indent="0">
+              <a:buNone/>
+            </a:pPr>
+            <a:r>
+              <a:rPr lang="en-US" sz="1200" dirty="0">
+                <a:solidFill>
+                  <a:srgbClr val="172033"/>
+                </a:solidFill>
+              </a:rPr>
+              <a:t>- Strip unused: `dnf remove kernel-modules-extra` / `apt purge linux-modules-extra-*`.</a:t>
+            </a:r>
           </a:p>
         </p:txBody>
       </p:sp>
@@ -12614,9 +12900,8 @@
                   <a:srgbClr val="FFFFFF"/>
                 </a:solidFill>
               </a:rPr>
-              <a:t>Validation: Compare `lsmod` to the approved list, test unsigned module rejection, and check `/proc/sys/kernel/modules_disabled`.</a:t>
-            </a:r>
-            <a:endParaRPr lang="en-US" sz="1200" dirty="0"/>
+              <a:t>Validation: `cat /proc/sys/kernel/modules_disabled`=1; `modprobe dccp` returns -EPERM; `modinfo &lt;m&gt; | grep signer` lists only org CA.</a:t>
+            </a:r>
           </a:p>
         </p:txBody>
       </p:sp>
@@ -13293,9 +13578,8 @@
                   <a:srgbClr val="172033"/>
                 </a:solidFill>
               </a:rPr>
-              <a:t>- Set `kernel.kptr_restrict=2`, `kernel.dmesg_restrict=1`, and strict `kernel.yama.ptrace_scope`.</a:t>
-            </a:r>
-            <a:endParaRPr lang="en-US" sz="1200" dirty="0"/>
+              <a:t>- Drop `/etc/sysctl.d/99-hardening.conf`: `kernel.kptr_restrict=2`, `kernel.dmesg_restrict=1`, `kernel.yama.ptrace_scope=2`, `kernel.kexec_load_disabled=1`.</a:t>
+            </a:r>
           </a:p>
           <a:p>
             <a:pPr marL="0" indent="0">
@@ -13307,9 +13591,8 @@
                   <a:srgbClr val="172033"/>
                 </a:solidFill>
               </a:rPr>
-              <a:t>- Disable unprivileged BPF and restrict perf events.</a:t>
-            </a:r>
-            <a:endParaRPr lang="en-US" sz="1200" dirty="0"/>
+              <a:t>- BPF/perf: `kernel.unprivileged_bpf_disabled=1`, `kernel.perf_event_paranoid=3`.</a:t>
+            </a:r>
           </a:p>
           <a:p>
             <a:pPr marL="0" indent="0">
@@ -13321,9 +13604,8 @@
                   <a:srgbClr val="172033"/>
                 </a:solidFill>
               </a:rPr>
-              <a:t>- Disable IP redirects and source routing.</a:t>
-            </a:r>
-            <a:endParaRPr lang="en-US" sz="1200" dirty="0"/>
+              <a:t>- Network: `net.ipv4.conf.all.rp_filter=1`, `.accept_redirects=0`, `.send_redirects=0`, `.accept_source_route=0`, `net.ipv4.tcp_syncookies=1`.</a:t>
+            </a:r>
           </a:p>
           <a:p>
             <a:pPr marL="0" indent="0">
@@ -13335,9 +13617,21 @@
                   <a:srgbClr val="172033"/>
                 </a:solidFill>
               </a:rPr>
-              <a:t>- Tune SYN cookies, backlog, and reverse-path filtering according to topology.</a:t>
-            </a:r>
-            <a:endParaRPr lang="en-US" sz="1200" dirty="0"/>
+              <a:t>- Memory: `vm.unprivileged_userfaultfd=0`, `kernel.randomize_va_space=2`.</a:t>
+            </a:r>
+          </a:p>
+          <a:p>
+            <a:pPr marL="0" indent="0">
+              <a:buNone/>
+            </a:pPr>
+            <a:r>
+              <a:rPr lang="en-US" sz="1200" dirty="0">
+                <a:solidFill>
+                  <a:srgbClr val="172033"/>
+                </a:solidFill>
+              </a:rPr>
+              <a:t>- IPv6 mirror of redirects/source-route; `fs.protected_*`=2 for hardlinks/symlinks/fifos/regular.</a:t>
+            </a:r>
           </a:p>
         </p:txBody>
       </p:sp>
@@ -13784,9 +14078,8 @@
                   <a:srgbClr val="FFFFFF"/>
                 </a:solidFill>
               </a:rPr>
-              <a:t>Validation: Run `sysctl --system`, inspect values, execute network regression tests, and verify application behavior.</a:t>
-            </a:r>
-            <a:endParaRPr lang="en-US" sz="1200" dirty="0"/>
+              <a:t>Validation: `sysctl --system &amp;&amp; sysctl -a | grep -E 'kptr|ptrace_scope|bpf_disabled|rp_filter'`; OpenSCAP profile `xccdf_org.ssgproject.content_profile_stig`.</a:t>
+            </a:r>
           </a:p>
         </p:txBody>
       </p:sp>
@@ -14463,9 +14756,8 @@
                   <a:srgbClr val="172033"/>
                 </a:solidFill>
               </a:rPr>
-              <a:t>- Run SELinux enforcing on RHEL-family systems or AppArmor enforce mode on Ubuntu/Debian.</a:t>
-            </a:r>
-            <a:endParaRPr lang="en-US" sz="1200" dirty="0"/>
+              <a:t>- RHEL: `setenforce 1` + `SELINUX=enforcing` in `/etc/selinux/config`; verify `getenforce`.</a:t>
+            </a:r>
           </a:p>
           <a:p>
             <a:pPr marL="0" indent="0">
@@ -14477,9 +14769,8 @@
                   <a:srgbClr val="172033"/>
                 </a:solidFill>
               </a:rPr>
-              <a:t>- Use targeted policies for exposed and privileged services.</a:t>
-            </a:r>
-            <a:endParaRPr lang="en-US" sz="1200" dirty="0"/>
+              <a:t>- Targeted policy: `semanage fcontext` + `restorecon` for app paths; `audit2allow -M mymodule` only after triage.</a:t>
+            </a:r>
           </a:p>
           <a:p>
             <a:pPr marL="0" indent="0">
@@ -14491,9 +14782,8 @@
                   <a:srgbClr val="172033"/>
                 </a:solidFill>
               </a:rPr>
-              <a:t>- Analyze AVC/AppArmor denials before writing custom policy.</a:t>
-            </a:r>
-            <a:endParaRPr lang="en-US" sz="1200" dirty="0"/>
+              <a:t>- Ubuntu/Debian: `aa-enforce /etc/apparmor.d/usr.sbin.&lt;svc&gt;`; `aa-status` to inventory.</a:t>
+            </a:r>
           </a:p>
           <a:p>
             <a:pPr marL="0" indent="0">
@@ -14505,9 +14795,21 @@
                   <a:srgbClr val="172033"/>
                 </a:solidFill>
               </a:rPr>
-              <a:t>- Avoid blanket permissive domains except during temporary diagnostics.</a:t>
-            </a:r>
-            <a:endParaRPr lang="en-US" sz="1200" dirty="0"/>
+              <a:t>- Booleans: review `getsebool -a`; flip to least-permissive (e.g., `setsebool -P httpd_can_network_connect off`).</a:t>
+            </a:r>
+          </a:p>
+          <a:p>
+            <a:pPr marL="0" indent="0">
+              <a:buNone/>
+            </a:pPr>
+            <a:r>
+              <a:rPr lang="en-US" sz="1200" dirty="0">
+                <a:solidFill>
+                  <a:srgbClr val="172033"/>
+                </a:solidFill>
+              </a:rPr>
+              <a:t>- Forbid permissive domains: `seinfo --permissive` should be empty in production.</a:t>
+            </a:r>
           </a:p>
         </p:txBody>
       </p:sp>
@@ -14954,9 +15256,8 @@
                   <a:srgbClr val="FFFFFF"/>
                 </a:solidFill>
               </a:rPr>
-              <a:t>Validation: Use `getenforce`, `ausearch -m avc`, `aa-status`, denied-access tests, and audit review.</a:t>
-            </a:r>
-            <a:endParaRPr lang="en-US" sz="1200" dirty="0"/>
+              <a:t>Validation: `getenforce`=Enforcing; `ausearch -m AVC -ts today | audit2why`; `aa-status | grep 'in enforce'` covers all policy-managed services.</a:t>
+            </a:r>
           </a:p>
         </p:txBody>
       </p:sp>
@@ -15633,9 +15934,8 @@
                   <a:srgbClr val="172033"/>
                 </a:solidFill>
               </a:rPr>
-              <a:t>- Remove unnecessary file capabilities.</a:t>
-            </a:r>
-            <a:endParaRPr lang="en-US" sz="1200" dirty="0"/>
+              <a:t>- Drop file caps: `setcap -r /path/to/binary` if not strictly required; audit `getcap -r /usr /sbin /bin /lib /opt`.</a:t>
+            </a:r>
           </a:p>
           <a:p>
             <a:pPr marL="0" indent="0">
@@ -15647,9 +15947,8 @@
                   <a:srgbClr val="172033"/>
                 </a:solidFill>
               </a:rPr>
-              <a:t>- Use `CapabilityBoundingSet=` and `AmbientCapabilities=` in systemd units.</a:t>
-            </a:r>
-            <a:endParaRPr lang="en-US" sz="1200" dirty="0"/>
+              <a:t>- systemd unit: `CapabilityBoundingSet=CAP_NET_BIND_SERVICE` (only what's needed); `AmbientCapabilities=` only when invoked.</a:t>
+            </a:r>
           </a:p>
           <a:p>
             <a:pPr marL="0" indent="0">
@@ -15661,9 +15960,8 @@
                   <a:srgbClr val="172033"/>
                 </a:solidFill>
               </a:rPr>
-              <a:t>- Avoid `CAP_SYS_ADMIN` except under formal exception.</a:t>
-            </a:r>
-            <a:endParaRPr lang="en-US" sz="1200" dirty="0"/>
+              <a:t>- Replace CAP_NET_BIND_SERVICE with `setcap cap_net_bind_service=+ep` on binary, then drop from unit.</a:t>
+            </a:r>
           </a:p>
           <a:p>
             <a:pPr marL="0" indent="0">
@@ -15675,9 +15973,21 @@
                   <a:srgbClr val="172033"/>
                 </a:solidFill>
               </a:rPr>
-              <a:t>- Prefer socket activation or reverse proxy patterns over broad capabilities.</a:t>
-            </a:r>
-            <a:endParaRPr lang="en-US" sz="1200" dirty="0"/>
+              <a:t>- Forbid CAP_SYS_ADMIN/CAP_SYS_MODULE/CAP_SYS_RAWIO/CAP_DAC_OVERRIDE in services without waiver.</a:t>
+            </a:r>
+          </a:p>
+          <a:p>
+            <a:pPr marL="0" indent="0">
+              <a:buNone/>
+            </a:pPr>
+            <a:r>
+              <a:rPr lang="en-US" sz="1200" dirty="0">
+                <a:solidFill>
+                  <a:srgbClr val="172033"/>
+                </a:solidFill>
+              </a:rPr>
+              <a:t>- Inspect runtime: `grep CapEff /proc/$(pidof svc)/status` against expected mask.</a:t>
+            </a:r>
           </a:p>
         </p:txBody>
       </p:sp>
@@ -16124,9 +16434,8 @@
                   <a:srgbClr val="FFFFFF"/>
                 </a:solidFill>
               </a:rPr>
-              <a:t>Validation: Run `getcap -r /`, inspect service capability sets, and check `/proc/&lt;pid&gt;/status`.</a:t>
-            </a:r>
-            <a:endParaRPr lang="en-US" sz="1200" dirty="0"/>
+              <a:t>Validation: `getcap -r / 2&gt;/dev/null` matches approved list; `capsh --decode=$(awk '/CapEff/{print $2}' /proc/&lt;pid&gt;/status)` shows least-privilege set.</a:t>
+            </a:r>
           </a:p>
         </p:txBody>
       </p:sp>
@@ -17765,9 +18074,8 @@
                   <a:srgbClr val="172033"/>
                 </a:solidFill>
               </a:rPr>
-              <a:t>- Use systemd `SystemCallFilter=`, `SystemCallArchitectures=native`, and `SystemCallErrorNumber=EPERM`.</a:t>
-            </a:r>
-            <a:endParaRPr lang="en-US" sz="1200" dirty="0"/>
+              <a:t>- systemd: `SystemCallFilter=@system-service`, `SystemCallArchitectures=native`, `SystemCallErrorNumber=EPERM`.</a:t>
+            </a:r>
           </a:p>
           <a:p>
             <a:pPr marL="0" indent="0">
@@ -17779,9 +18087,8 @@
                   <a:srgbClr val="172033"/>
                 </a:solidFill>
               </a:rPr>
-              <a:t>- Use container seccomp profiles where containers exist.</a:t>
-            </a:r>
-            <a:endParaRPr lang="en-US" sz="1200" dirty="0"/>
+              <a:t>- Deny extra: `SystemCallFilter=~@cpu-emulation @debug @keyring @module @mount @obsolete @raw-io @reboot @swap @privileged`.</a:t>
+            </a:r>
           </a:p>
           <a:p>
             <a:pPr marL="0" indent="0">
@@ -17793,9 +18100,8 @@
                   <a:srgbClr val="172033"/>
                 </a:solidFill>
               </a:rPr>
-              <a:t>- Build profiles from observed workload behavior.</a:t>
-            </a:r>
-            <a:endParaRPr lang="en-US" sz="1200" dirty="0"/>
+              <a:t>- Container: `--security-opt seccomp=/etc/containers/seccomp.json` (CRI-O default + custom drop list).</a:t>
+            </a:r>
           </a:p>
           <a:p>
             <a:pPr marL="0" indent="0">
@@ -17807,9 +18113,21 @@
                   <a:srgbClr val="172033"/>
                 </a:solidFill>
               </a:rPr>
-              <a:t>- Enforce per-service profiles rather than a generic global profile.</a:t>
-            </a:r>
-            <a:endParaRPr lang="en-US" sz="1200" dirty="0"/>
+              <a:t>- Build profile from observed run: `strace -f -e trace=%file,%network,%process` -&gt; distil into allowlist.</a:t>
+            </a:r>
+          </a:p>
+          <a:p>
+            <a:pPr marL="0" indent="0">
+              <a:buNone/>
+            </a:pPr>
+            <a:r>
+              <a:rPr lang="en-US" sz="1200" dirty="0">
+                <a:solidFill>
+                  <a:srgbClr val="172033"/>
+                </a:solidFill>
+              </a:rPr>
+              <a:t>- Verify: `systemd-analyze security &lt;unit&gt;` should report exposure level &lt;= 2.0 for hardened services.</a:t>
+            </a:r>
           </a:p>
         </p:txBody>
       </p:sp>
@@ -18256,9 +18574,8 @@
                   <a:srgbClr val="FFFFFF"/>
                 </a:solidFill>
               </a:rPr>
-              <a:t>Validation: Use `systemd-analyze security`, staging `strace`, service regression tests, and audit-denial review.</a:t>
-            </a:r>
-            <a:endParaRPr lang="en-US" sz="1200" dirty="0"/>
+              <a:t>Validation: `systemd-analyze security &lt;svc&gt;` exposure score; `auditctl -w /usr/bin/&lt;svc&gt; -p x` + `ausearch -k seccomp`; staging strace shows zero unexpected syscalls.</a:t>
+            </a:r>
           </a:p>
         </p:txBody>
       </p:sp>
@@ -18935,9 +19252,8 @@
                   <a:srgbClr val="172033"/>
                 </a:solidFill>
               </a:rPr>
-              <a:t>- Use mount, PID, network, IPC, user, and UTS namespaces where appropriate.</a:t>
-            </a:r>
-            <a:endParaRPr lang="en-US" sz="1200" dirty="0"/>
+              <a:t>- cgroup v2 only: `systemd.unified_cgroup_hierarchy=1` on cmdline; verify with `mount | grep cgroup2`.</a:t>
+            </a:r>
           </a:p>
           <a:p>
             <a:pPr marL="0" indent="0">
@@ -18949,9 +19265,8 @@
                   <a:srgbClr val="172033"/>
                 </a:solidFill>
               </a:rPr>
-              <a:t>- Use cgroups v2 for CPU, memory, IO, pids, and device control.</a:t>
-            </a:r>
-            <a:endParaRPr lang="en-US" sz="1200" dirty="0"/>
+              <a:t>- Service limits: `MemoryMax=`, `CPUQuota=`, `IOWeight=`, `TasksMax=`, `DevicePolicy=closed` per unit.</a:t>
+            </a:r>
           </a:p>
           <a:p>
             <a:pPr marL="0" indent="0">
@@ -18963,9 +19278,8 @@
                   <a:srgbClr val="172033"/>
                 </a:solidFill>
               </a:rPr>
-              <a:t>- Disable unprivileged namespaces unless required.</a:t>
-            </a:r>
-            <a:endParaRPr lang="en-US" sz="1200" dirty="0"/>
+              <a:t>- Disable unprivileged user namespaces: `kernel.unprivileged_userns_clone=0` (Debian) or built-out kernel (RHEL).</a:t>
+            </a:r>
           </a:p>
           <a:p>
             <a:pPr marL="0" indent="0">
@@ -18977,9 +19291,21 @@
                   <a:srgbClr val="172033"/>
                 </a:solidFill>
               </a:rPr>
-              <a:t>- Avoid privileged containers unless formally approved.</a:t>
-            </a:r>
-            <a:endParaRPr lang="en-US" sz="1200" dirty="0"/>
+              <a:t>- LXC unprivileged only: `lxc.idmap = u 0 100000 65536` + same for gid; AppArmor profile `lxc-default-cgns`.</a:t>
+            </a:r>
+          </a:p>
+          <a:p>
+            <a:pPr marL="0" indent="0">
+              <a:buNone/>
+            </a:pPr>
+            <a:r>
+              <a:rPr lang="en-US" sz="1200" dirty="0">
+                <a:solidFill>
+                  <a:srgbClr val="172033"/>
+                </a:solidFill>
+              </a:rPr>
+              <a:t>- Forbid privileged containers via admission policy / waiver.</a:t>
+            </a:r>
           </a:p>
         </p:txBody>
       </p:sp>
@@ -19426,9 +19752,8 @@
                   <a:srgbClr val="FFFFFF"/>
                 </a:solidFill>
               </a:rPr>
-              <a:t>Validation: Inspect `/proc/&lt;pid&gt;/ns`, use `systemd-cgls`, run resource stress tests, and verify limit behavior.</a:t>
-            </a:r>
-            <a:endParaRPr lang="en-US" sz="1200" dirty="0"/>
+              <a:t>Validation: `systemd-cgls`, `cat /proc/&lt;pid&gt;/status | grep Ns`, stress-ng under MemoryMax shows OOM-kill; `unshare -U` denied for unprivileged user.</a:t>
+            </a:r>
           </a:p>
         </p:txBody>
       </p:sp>
@@ -20105,9 +20430,8 @@
                   <a:srgbClr val="172033"/>
                 </a:solidFill>
               </a:rPr>
-              <a:t>- Use `nodev`, `nosuid`, and `noexec` on `/tmp`, `/var/tmp`, removable media, and data partitions where feasible.</a:t>
-            </a:r>
-            <a:endParaRPr lang="en-US" sz="1200" dirty="0"/>
+              <a:t>- /etc/fstab: `/tmp tmpfs nodev,nosuid,noexec,size=512M 0 0` (or `tmp.mount` with same flags).</a:t>
+            </a:r>
           </a:p>
           <a:p>
             <a:pPr marL="0" indent="0">
@@ -20119,9 +20443,8 @@
                   <a:srgbClr val="172033"/>
                 </a:solidFill>
               </a:rPr>
-              <a:t>- Separate `/var`, `/var/log`, `/tmp`, and application data when containment or availability justifies it.</a:t>
-            </a:r>
-            <a:endParaRPr lang="en-US" sz="1200" dirty="0"/>
+              <a:t>- Same flags for `/var/tmp`, `/dev/shm`, `/home`, `/var/log/audit`.</a:t>
+            </a:r>
           </a:p>
           <a:p>
             <a:pPr marL="0" indent="0">
@@ -20133,9 +20456,8 @@
                   <a:srgbClr val="172033"/>
                 </a:solidFill>
               </a:rPr>
-              <a:t>- Use read-only mounts for static application content.</a:t>
-            </a:r>
-            <a:endParaRPr lang="en-US" sz="1200" dirty="0"/>
+              <a:t>- Removable media via `udisks2` or `udev` rules: `MOUNT_OPTIONS=nodev,nosuid,noexec,ro`.</a:t>
+            </a:r>
           </a:p>
           <a:p>
             <a:pPr marL="0" indent="0">
@@ -20147,9 +20469,21 @@
                   <a:srgbClr val="172033"/>
                 </a:solidFill>
               </a:rPr>
-              <a:t>- Document any execution-required writable paths.</a:t>
-            </a:r>
-            <a:endParaRPr lang="en-US" sz="1200" dirty="0"/>
+              <a:t>- Read-only `/usr` (with `usrmerge`): remount-ro post-boot via `systemd.mount` drop-in.</a:t>
+            </a:r>
+          </a:p>
+          <a:p>
+            <a:pPr marL="0" indent="0">
+              <a:buNone/>
+            </a:pPr>
+            <a:r>
+              <a:rPr lang="en-US" sz="1200" dirty="0">
+                <a:solidFill>
+                  <a:srgbClr val="172033"/>
+                </a:solidFill>
+              </a:rPr>
+              <a:t>- Application data: separate partition with `nosuid,nodev`; `noexec` if no scripts run there.</a:t>
+            </a:r>
           </a:p>
         </p:txBody>
       </p:sp>
@@ -20596,9 +20930,8 @@
                   <a:srgbClr val="FFFFFF"/>
                 </a:solidFill>
               </a:rPr>
-              <a:t>Validation: Run `findmnt -o TARGET,OPTIONS`, review `fstab`, and perform negative execution tests.</a:t>
-            </a:r>
-            <a:endParaRPr lang="en-US" sz="1200" dirty="0"/>
+              <a:t>Validation: `findmnt -no TARGET,OPTIONS /tmp /var/tmp /dev/shm /home`; `cp /bin/sh /tmp/x &amp;&amp; /tmp/x` returns Permission denied.</a:t>
+            </a:r>
           </a:p>
         </p:txBody>
       </p:sp>
@@ -21275,9 +21608,8 @@
                   <a:srgbClr val="172033"/>
                 </a:solidFill>
               </a:rPr>
-              <a:t>- Use `chattr +i` for selected static critical files.</a:t>
-            </a:r>
-            <a:endParaRPr lang="en-US" sz="1200" dirty="0"/>
+              <a:t>- Immutable: `chattr +i /etc/passwd /etc/shadow /etc/group /etc/sudoers /boot/grub2/grub.cfg`.</a:t>
+            </a:r>
           </a:p>
           <a:p>
             <a:pPr marL="0" indent="0">
@@ -21289,9 +21621,8 @@
                   <a:srgbClr val="172033"/>
                 </a:solidFill>
               </a:rPr>
-              <a:t>- Use `chattr +a` for append-only log paths where operationally safe.</a:t>
-            </a:r>
-            <a:endParaRPr lang="en-US" sz="1200" dirty="0"/>
+              <a:t>- Append-only: `chattr +a /var/log/audit/audit.log /var/log/secure` (works only with auditd's append behavior).</a:t>
+            </a:r>
           </a:p>
           <a:p>
             <a:pPr marL="0" indent="0">
@@ -21303,9 +21634,8 @@
                   <a:srgbClr val="172033"/>
                 </a:solidFill>
               </a:rPr>
-              <a:t>- Maintain an immutable file inventory.</a:t>
-            </a:r>
-            <a:endParaRPr lang="en-US" sz="1200" dirty="0"/>
+              <a:t>- Inventory: `find / -xdev \( -e i -o -e a \) -printf '%p %#m %#a\n' &gt; /var/lib/baseline/immutable.list`.</a:t>
+            </a:r>
           </a:p>
           <a:p>
             <a:pPr marL="0" indent="0">
@@ -21317,9 +21647,21 @@
                   <a:srgbClr val="172033"/>
                 </a:solidFill>
               </a:rPr>
-              <a:t>- Combine with integrity monitoring and controlled maintenance windows.</a:t>
-            </a:r>
-            <a:endParaRPr lang="en-US" sz="1200" dirty="0"/>
+              <a:t>- Lift before patch: documented runbook `chattr -i ...; dnf update; chattr +i ...`.</a:t>
+            </a:r>
+          </a:p>
+          <a:p>
+            <a:pPr marL="0" indent="0">
+              <a:buNone/>
+            </a:pPr>
+            <a:r>
+              <a:rPr lang="en-US" sz="1200" dirty="0">
+                <a:solidFill>
+                  <a:srgbClr val="172033"/>
+                </a:solidFill>
+              </a:rPr>
+              <a:t>- Pair with auditd `-w` watch on the same paths so any flag flip is logged.</a:t>
+            </a:r>
           </a:p>
         </p:txBody>
       </p:sp>
@@ -21766,9 +22108,8 @@
                   <a:srgbClr val="FFFFFF"/>
                 </a:solidFill>
               </a:rPr>
-              <a:t>Validation: Run `lsattr`, attempt controlled modification in staging, and verify update behavior.</a:t>
-            </a:r>
-            <a:endParaRPr lang="en-US" sz="1200" dirty="0"/>
+              <a:t>Validation: `lsattr /etc/passwd` shows `i`; `echo x &gt;&gt; /etc/passwd` returns EPERM; `chattr -i` works only after sudo + audit event recorded.</a:t>
+            </a:r>
           </a:p>
         </p:txBody>
       </p:sp>
@@ -22445,9 +22786,8 @@
                   <a:srgbClr val="172033"/>
                 </a:solidFill>
               </a:rPr>
-              <a:t>- Use dm-verity for read-only root or appliance-style partitions.</a:t>
-            </a:r>
-            <a:endParaRPr lang="en-US" sz="1200" dirty="0"/>
+              <a:t>- Format: `veritysetup format /dev/sda2 /dev/sda3` -&gt; capture root hash; sign with offline CA.</a:t>
+            </a:r>
           </a:p>
           <a:p>
             <a:pPr marL="0" indent="0">
@@ -22459,9 +22799,8 @@
                   <a:srgbClr val="172033"/>
                 </a:solidFill>
               </a:rPr>
-              <a:t>- Use fs-verity for read-only file authenticity on supported filesystems.</a:t>
-            </a:r>
-            <a:endParaRPr lang="en-US" sz="1200" dirty="0"/>
+              <a:t>- Embed root hash + signature in initramfs or kernel cmdline (`roothash=&lt;hex&gt;`).</a:t>
+            </a:r>
           </a:p>
           <a:p>
             <a:pPr marL="0" indent="0">
@@ -22473,9 +22812,8 @@
                   <a:srgbClr val="172033"/>
                 </a:solidFill>
               </a:rPr>
-              <a:t>- Protect root hashes/signatures through the boot trust chain.</a:t>
-            </a:r>
-            <a:endParaRPr lang="en-US" sz="1200" dirty="0"/>
+              <a:t>- Open at boot: `veritysetup open /dev/sda2 root /dev/sda3 &lt;roothash&gt;`; mount `/dev/mapper/root` ro.</a:t>
+            </a:r>
           </a:p>
           <a:p>
             <a:pPr marL="0" indent="0">
@@ -22487,9 +22825,21 @@
                   <a:srgbClr val="172033"/>
                 </a:solidFill>
               </a:rPr>
-              <a:t>- Define corruption behavior: fail I/O, reboot, alert, or halt based on mission safety.</a:t>
-            </a:r>
-            <a:endParaRPr lang="en-US" sz="1200" dirty="0"/>
+              <a:t>- fs-verity for individual files (ext4/btrfs/f2fs): `fsverity enable --signature=sig &lt;file&gt;`.</a:t>
+            </a:r>
+          </a:p>
+          <a:p>
+            <a:pPr marL="0" indent="0">
+              <a:buNone/>
+            </a:pPr>
+            <a:r>
+              <a:rPr lang="en-US" sz="1200" dirty="0">
+                <a:solidFill>
+                  <a:srgbClr val="172033"/>
+                </a:solidFill>
+              </a:rPr>
+              <a:t>- Failure policy: kernel cmdline `dm-verity.error_behavior=panic` (or `restart`) for mission-critical.</a:t>
+            </a:r>
           </a:p>
         </p:txBody>
       </p:sp>
@@ -22936,9 +23286,8 @@
                   <a:srgbClr val="FFFFFF"/>
                 </a:solidFill>
               </a:rPr>
-              <a:t>Validation: Use `veritysetup`, inspect root hash metadata, perform controlled tamper tests, and verify boot/runtime response.</a:t>
-            </a:r>
-            <a:endParaRPr lang="en-US" sz="1200" dirty="0"/>
+              <a:t>Validation: `veritysetup status root`; `dd if=/dev/sda3 of=/dev/sda3 bs=512 count=1 seek=10000` (tamper) -&gt; kernel logs verity error and IO fails.</a:t>
+            </a:r>
           </a:p>
         </p:txBody>
       </p:sp>
@@ -23615,9 +23964,8 @@
                   <a:srgbClr val="172033"/>
                 </a:solidFill>
               </a:rPr>
-              <a:t>- Use LUKS2 with approved cryptographic parameters.</a:t>
-            </a:r>
-            <a:endParaRPr lang="en-US" sz="1200" dirty="0"/>
+              <a:t>- Format: `cryptsetup luksFormat --type luks2 --cipher aes-xts-plain64 --key-size 512 --hash sha512 --pbkdf argon2id --pbkdf-memory 1048576 /dev/sdX`.</a:t>
+            </a:r>
           </a:p>
           <a:p>
             <a:pPr marL="0" indent="0">
@@ -23629,9 +23977,8 @@
                   <a:srgbClr val="172033"/>
                 </a:solidFill>
               </a:rPr>
-              <a:t>- Encrypt data partitions and root volumes where supportable.</a:t>
-            </a:r>
-            <a:endParaRPr lang="en-US" sz="1200" dirty="0"/>
+              <a:t>- Bind to TPM PCRs: `clevis luks bind -d /dev/sdX tpm2 '{"pcr_ids":"0,2,4,7"}'`.</a:t>
+            </a:r>
           </a:p>
           <a:p>
             <a:pPr marL="0" indent="0">
@@ -23643,9 +23990,8 @@
                   <a:srgbClr val="172033"/>
                 </a:solidFill>
               </a:rPr>
-              <a:t>- Use TPM-bound unlock only after measured-boot workflow is stable.</a:t>
-            </a:r>
-            <a:endParaRPr lang="en-US" sz="1200" dirty="0"/>
+              <a:t>- Recovery key in offline escrow (paper + sealed safe + duplicate at second site).</a:t>
+            </a:r>
           </a:p>
           <a:p>
             <a:pPr marL="0" indent="0">
@@ -23657,9 +24003,21 @@
                   <a:srgbClr val="172033"/>
                 </a:solidFill>
               </a:rPr>
-              <a:t>- Maintain recovery keys in controlled escrow.</a:t>
-            </a:r>
-            <a:endParaRPr lang="en-US" sz="1200" dirty="0"/>
+              <a:t>- Encrypt swap: `cryptsetup open --type plain --key-file /dev/urandom /dev/sdY swap`.</a:t>
+            </a:r>
+          </a:p>
+          <a:p>
+            <a:pPr marL="0" indent="0">
+              <a:buNone/>
+            </a:pPr>
+            <a:r>
+              <a:rPr lang="en-US" sz="1200" dirty="0">
+                <a:solidFill>
+                  <a:srgbClr val="172033"/>
+                </a:solidFill>
+              </a:rPr>
+              <a:t>- Avoid TPM-only unlock until measured-boot pipeline is stable for &gt;= 30 days.</a:t>
+            </a:r>
           </a:p>
         </p:txBody>
       </p:sp>
@@ -24106,9 +24464,8 @@
                   <a:srgbClr val="FFFFFF"/>
                 </a:solidFill>
               </a:rPr>
-              <a:t>Validation: Run `cryptsetup luksDump`, inspect `lsblk -f`, test recovery unlock, and benchmark storage.</a:t>
-            </a:r>
-            <a:endParaRPr lang="en-US" sz="1200" dirty="0"/>
+              <a:t>Validation: `cryptsetup luksDump /dev/sdX` shows luks2 + argon2id + bound clevis; benchmark `cryptsetup benchmark`; recovery unlock dry-run quarterly.</a:t>
+            </a:r>
           </a:p>
         </p:txBody>
       </p:sp>
@@ -24785,9 +25142,8 @@
                   <a:srgbClr val="172033"/>
                 </a:solidFill>
               </a:rPr>
-              <a:t>- Mirror only approved upstream repositories.</a:t>
-            </a:r>
-            <a:endParaRPr lang="en-US" sz="1200" dirty="0"/>
+              <a:t>- yum/dnf: `gpgcheck=1 repo_gpgcheck=1 sslverify=1 localpkg_gpgcheck=1`; remove `enabled=1` from upstream repos.</a:t>
+            </a:r>
           </a:p>
           <a:p>
             <a:pPr marL="0" indent="0">
@@ -24799,9 +25155,8 @@
                   <a:srgbClr val="172033"/>
                 </a:solidFill>
               </a:rPr>
-              <a:t>- Verify upstream signatures before import.</a:t>
-            </a:r>
-            <a:endParaRPr lang="en-US" sz="1200" dirty="0"/>
+              <a:t>- apt: `Acquire::AllowInsecureRepositories "false"; Acquire::AllowDowngradeToInsecureRepositories "false";`; sign Release file with org key.</a:t>
+            </a:r>
           </a:p>
           <a:p>
             <a:pPr marL="0" indent="0">
@@ -24813,9 +25168,8 @@
                   <a:srgbClr val="172033"/>
                 </a:solidFill>
               </a:rPr>
-              <a:t>- Re-sign internal repositories where required.</a:t>
-            </a:r>
-            <a:endParaRPr lang="en-US" sz="1200" dirty="0"/>
+              <a:t>- Mirror with `reposync --gpgcheck --download-metadata` (or `apt-mirror`); promote intake -&gt; staging -&gt; prod via signed manifest.</a:t>
+            </a:r>
           </a:p>
           <a:p>
             <a:pPr marL="0" indent="0">
@@ -24827,9 +25181,21 @@
                   <a:srgbClr val="172033"/>
                 </a:solidFill>
               </a:rPr>
-              <a:t>- Disable unsigned packages and pin repository sources.</a:t>
-            </a:r>
-            <a:endParaRPr lang="en-US" sz="1200" dirty="0"/>
+              <a:t>- Pin sources: `dnf config-manager --set-disabled '*'; --set-enabled enclave-prod`.</a:t>
+            </a:r>
+          </a:p>
+          <a:p>
+            <a:pPr marL="0" indent="0">
+              <a:buNone/>
+            </a:pPr>
+            <a:r>
+              <a:rPr lang="en-US" sz="1200" dirty="0">
+                <a:solidFill>
+                  <a:srgbClr val="172033"/>
+                </a:solidFill>
+              </a:rPr>
+              <a:t>- Strip `apt`/`dnf` networking: `Acquire::http::Proxy "DIRECT";` -&gt; internal mirror only.</a:t>
+            </a:r>
           </a:p>
         </p:txBody>
       </p:sp>
@@ -25276,9 +25642,8 @@
                   <a:srgbClr val="FFFFFF"/>
                 </a:solidFill>
               </a:rPr>
-              <a:t>Validation: Attempt unsigned package install in staging, verify repo metadata signatures, and compare package inventory to manifest.</a:t>
-            </a:r>
-            <a:endParaRPr lang="en-US" sz="1200" dirty="0"/>
+              <a:t>Validation: `dnf install &lt;pkg-without-sig&gt;` fails with NOKEY; `apt update` against external mirror times out; `rpm --checksig` on every staged package.</a:t>
+            </a:r>
           </a:p>
         </p:txBody>
       </p:sp>
@@ -25955,9 +26320,8 @@
                   <a:srgbClr val="172033"/>
                 </a:solidFill>
               </a:rPr>
-              <a:t>- Generate SBOMs for golden images, applications, containers, firmware, and repositories.</a:t>
-            </a:r>
-            <a:endParaRPr lang="en-US" sz="1200" dirty="0"/>
+              <a:t>- Generate: `syft packages dir:/ -o spdx-json=/var/lib/sbom/host.spdx.json` per host build.</a:t>
+            </a:r>
           </a:p>
           <a:p>
             <a:pPr marL="0" indent="0">
@@ -25969,9 +26333,8 @@
                   <a:srgbClr val="172033"/>
                 </a:solidFill>
               </a:rPr>
-              <a:t>- Use SPDX or CycloneDX.</a:t>
-            </a:r>
-            <a:endParaRPr lang="en-US" sz="1200" dirty="0"/>
+              <a:t>- Per-image: `syft &lt;image&gt; -o cyclonedx-json` saved with image hash in artifact registry.</a:t>
+            </a:r>
           </a:p>
           <a:p>
             <a:pPr marL="0" indent="0">
@@ -25983,9 +26346,8 @@
                   <a:srgbClr val="172033"/>
                 </a:solidFill>
               </a:rPr>
-              <a:t>- Track source, version, hash, signature, license, and approval status.</a:t>
-            </a:r>
-            <a:endParaRPr lang="en-US" sz="1200" dirty="0"/>
+              <a:t>- Diff drift: `syft diff prod.spdx baseline.spdx`; alert on unexpected adds.</a:t>
+            </a:r>
           </a:p>
           <a:p>
             <a:pPr marL="0" indent="0">
@@ -25997,9 +26359,21 @@
                   <a:srgbClr val="172033"/>
                 </a:solidFill>
               </a:rPr>
-              <a:t>- Import vulnerability intelligence through a controlled channel.</a:t>
-            </a:r>
-            <a:endParaRPr lang="en-US" sz="1200" dirty="0"/>
+              <a:t>- Vulnerability match offline: `grype --db-cache /var/lib/grype-db host.spdx.json`.</a:t>
+            </a:r>
+          </a:p>
+          <a:p>
+            <a:pPr marL="0" indent="0">
+              <a:buNone/>
+            </a:pPr>
+            <a:r>
+              <a:rPr lang="en-US" sz="1200" dirty="0">
+                <a:solidFill>
+                  <a:srgbClr val="172033"/>
+                </a:solidFill>
+              </a:rPr>
+              <a:t>- Track per component: PURL, version, sha256, signer, license, approval-state.</a:t>
+            </a:r>
           </a:p>
         </p:txBody>
       </p:sp>
@@ -26446,9 +26820,8 @@
                   <a:srgbClr val="FFFFFF"/>
                 </a:solidFill>
               </a:rPr>
-              <a:t>Validation: Compare installed inventory to SBOM and run offline vulnerability scans against imported databases.</a:t>
-            </a:r>
-            <a:endParaRPr lang="en-US" sz="1200" dirty="0"/>
+              <a:t>Validation: `grype &lt;sbom&gt;` against locally-mirrored CVE DB returns expected open issues; sample 10 binaries vs SBOM with `rpm -qf` / `dpkg -S`.</a:t>
+            </a:r>
           </a:p>
         </p:txBody>
       </p:sp>
@@ -27125,9 +27498,8 @@
                   <a:srgbClr val="172033"/>
                 </a:solidFill>
               </a:rPr>
-              <a:t>- Disable root login and password login where practical.</a:t>
-            </a:r>
-            <a:endParaRPr lang="en-US" sz="1200" dirty="0"/>
+              <a:t>- /etc/ssh/sshd_config.d/00-hardening.conf: `PermitRootLogin no`, `PasswordAuthentication no`, `KbdInteractiveAuthentication no`, `PermitEmptyPasswords no`.</a:t>
+            </a:r>
           </a:p>
           <a:p>
             <a:pPr marL="0" indent="0">
@@ -27139,9 +27511,8 @@
                   <a:srgbClr val="172033"/>
                 </a:solidFill>
               </a:rPr>
-              <a:t>- Restrict users or groups with `AllowUsers` or `AllowGroups`.</a:t>
-            </a:r>
-            <a:endParaRPr lang="en-US" sz="1200" dirty="0"/>
+              <a:t>- `AllowGroups ssh-operators`; `AllowAgentForwarding no`; `X11Forwarding no`; `AllowTcpForwarding no`; `PermitTunnel no`.</a:t>
+            </a:r>
           </a:p>
           <a:p>
             <a:pPr marL="0" indent="0">
@@ -27153,9 +27524,8 @@
                   <a:srgbClr val="172033"/>
                 </a:solidFill>
               </a:rPr>
-              <a:t>- Disable agent forwarding, X11 forwarding, and TCP forwarding unless required.</a:t>
-            </a:r>
-            <a:endParaRPr lang="en-US" sz="1200" dirty="0"/>
+              <a:t>- KEX/Ciphers: `KexAlgorithms curve25519-sha256,curve25519-sha256@libssh.org`; `Ciphers chacha20-poly1305@openssh.com,aes256-gcm@openssh.com`; `MACs hmac-sha2-512-etm@openssh.com`.</a:t>
+            </a:r>
           </a:p>
           <a:p>
             <a:pPr marL="0" indent="0">
@@ -27167,9 +27537,21 @@
                   <a:srgbClr val="172033"/>
                 </a:solidFill>
               </a:rPr>
-              <a:t>- Use strong host key algorithms and record host fingerprints.</a:t>
-            </a:r>
-            <a:endParaRPr lang="en-US" sz="1200" dirty="0"/>
+              <a:t>- `HostKeyAlgorithms ssh-ed25519,rsa-sha2-512`; record fingerprints in `/etc/ssh/ssh_known_hosts` cluster-wide.</a:t>
+            </a:r>
+          </a:p>
+          <a:p>
+            <a:pPr marL="0" indent="0">
+              <a:buNone/>
+            </a:pPr>
+            <a:r>
+              <a:rPr lang="en-US" sz="1200" dirty="0">
+                <a:solidFill>
+                  <a:srgbClr val="172033"/>
+                </a:solidFill>
+              </a:rPr>
+              <a:t>- Break-glass: physical console with sealed root password in escrow; documented in M32.</a:t>
+            </a:r>
           </a:p>
         </p:txBody>
       </p:sp>
@@ -27616,9 +27998,8 @@
                   <a:srgbClr val="FFFFFF"/>
                 </a:solidFill>
               </a:rPr>
-              <a:t>Validation: Run `sshd -T`, perform prohibited login tests, and review authentication logs.</a:t>
-            </a:r>
-            <a:endParaRPr lang="en-US" sz="1200" dirty="0"/>
+              <a:t>Validation: `sshd -T | grep -E 'permitroot|password|forwarding|kex|ciphers'`; `ssh -o PreferredAuthentications=password root@host` rejected; `nmap --script ssh2-enum-algos`.</a:t>
+            </a:r>
           </a:p>
         </p:txBody>
       </p:sp>
@@ -28295,9 +28676,8 @@
                   <a:srgbClr val="172033"/>
                 </a:solidFill>
               </a:rPr>
-              <a:t>- Enforce default-deny inbound and restrict outbound where architecture permits.</a:t>
-            </a:r>
-            <a:endParaRPr lang="en-US" sz="1200" dirty="0"/>
+              <a:t>- nftables baseline (`/etc/nftables/baseline.nft`):</a:t>
+            </a:r>
           </a:p>
           <a:p>
             <a:pPr marL="0" indent="0">
@@ -28309,9 +28689,8 @@
                   <a:srgbClr val="172033"/>
                 </a:solidFill>
               </a:rPr>
-              <a:t>- Permit only documented ports, protocols, and peers.</a:t>
-            </a:r>
-            <a:endParaRPr lang="en-US" sz="1200" dirty="0"/>
+              <a:t>  `table inet filter { chain input { type filter hook input priority 0; policy drop; ct state established,related accept; iif lo accept; tcp dport 22 ip saddr &lt;mgmt-cidr&gt; accept; } }`</a:t>
+            </a:r>
           </a:p>
           <a:p>
             <a:pPr marL="0" indent="0">
@@ -28323,9 +28702,8 @@
                   <a:srgbClr val="172033"/>
                 </a:solidFill>
               </a:rPr>
-              <a:t>- Use nftables, firewalld, or iptables consistently.</a:t>
-            </a:r>
-            <a:endParaRPr lang="en-US" sz="1200" dirty="0"/>
+              <a:t>- Default-drop on output where workload permits; allowlist by destination CIDR + port.</a:t>
+            </a:r>
           </a:p>
           <a:p>
             <a:pPr marL="0" indent="0">
@@ -28337,9 +28715,34 @@
                   <a:srgbClr val="172033"/>
                 </a:solidFill>
               </a:rPr>
-              <a:t>- Bind services only to required interfaces and maintain a flow matrix.</a:t>
-            </a:r>
-            <a:endParaRPr lang="en-US" sz="1200" dirty="0"/>
+              <a:t>- Bind services to specific interfaces: `ListenAddress 10.0.0.5` not `0.0.0.0`.</a:t>
+            </a:r>
+          </a:p>
+          <a:p>
+            <a:pPr marL="0" indent="0">
+              <a:buNone/>
+            </a:pPr>
+            <a:r>
+              <a:rPr lang="en-US" sz="1200" dirty="0">
+                <a:solidFill>
+                  <a:srgbClr val="172033"/>
+                </a:solidFill>
+              </a:rPr>
+              <a:t>- Maintain flow matrix CSV (src, dst, port, proto, owner) under CM; regenerate ruleset from it.</a:t>
+            </a:r>
+          </a:p>
+          <a:p>
+            <a:pPr marL="0" indent="0">
+              <a:buNone/>
+            </a:pPr>
+            <a:r>
+              <a:rPr lang="en-US" sz="1200" dirty="0">
+                <a:solidFill>
+                  <a:srgbClr val="172033"/>
+                </a:solidFill>
+              </a:rPr>
+              <a:t>- Disable `firewalld` and `iptables-legacy` to prevent dual-stack drift.</a:t>
+            </a:r>
           </a:p>
         </p:txBody>
       </p:sp>
@@ -28786,9 +29189,8 @@
                   <a:srgbClr val="FFFFFF"/>
                 </a:solidFill>
               </a:rPr>
-              <a:t>Validation: Run `ss -tulpen`, inspect firewall rules, and scan from an approved test host.</a:t>
-            </a:r>
-            <a:endParaRPr lang="en-US" sz="1200" dirty="0"/>
+              <a:t>Validation: `nft list ruleset`; `ss -tulpen` matches flow matrix; `nmap -sS -p- &lt;host&gt;` from approved test station shows only allowlisted ports.</a:t>
+            </a:r>
           </a:p>
         </p:txBody>
       </p:sp>
@@ -30699,9 +31101,8 @@
                   <a:srgbClr val="172033"/>
                 </a:solidFill>
               </a:rPr>
-              <a:t>- Use internal NTP or PTP sources with chrony or equivalent.</a:t>
-            </a:r>
-            <a:endParaRPr lang="en-US" sz="1200" dirty="0"/>
+              <a:t>- chrony.conf: `server 10.0.0.10 iburst minpoll 4 maxpoll 6` (internal stratum-1 with GPS/Rb).</a:t>
+            </a:r>
           </a:p>
           <a:p>
             <a:pPr marL="0" indent="0">
@@ -30713,9 +31114,8 @@
                   <a:srgbClr val="172033"/>
                 </a:solidFill>
               </a:rPr>
-              <a:t>- Define GPS, rubidium/OCXO, or manually governed source of truth.</a:t>
-            </a:r>
-            <a:endParaRPr lang="en-US" sz="1200" dirty="0"/>
+              <a:t>- `local stratum 10`; `allow 10.0.0.0/24`; `deny all`; `makestep 1.0 3`; `rtcsync`; `leapsectz right/UTC`.</a:t>
+            </a:r>
           </a:p>
           <a:p>
             <a:pPr marL="0" indent="0">
@@ -30727,9 +31127,8 @@
                   <a:srgbClr val="172033"/>
                 </a:solidFill>
               </a:rPr>
-              <a:t>- Restrict clients and segment time servers.</a:t>
-            </a:r>
-            <a:endParaRPr lang="en-US" sz="1200" dirty="0"/>
+              <a:t>- Holdover: stratum-1 with OCXO/Rb runs &gt;= 24h within 10us during GPS loss.</a:t>
+            </a:r>
           </a:p>
           <a:p>
             <a:pPr marL="0" indent="0">
@@ -30741,9 +31140,21 @@
                   <a:srgbClr val="172033"/>
                 </a:solidFill>
               </a:rPr>
-              <a:t>- Define holdover behavior during reference loss.</a:t>
-            </a:r>
-            <a:endParaRPr lang="en-US" sz="1200" dirty="0"/>
+              <a:t>- PTP for sub-microsecond: `ptp4l -i eth0 -s -m`; `phc2sys` to sync system clock; HW timestamping NICs only.</a:t>
+            </a:r>
+          </a:p>
+          <a:p>
+            <a:pPr marL="0" indent="0">
+              <a:buNone/>
+            </a:pPr>
+            <a:r>
+              <a:rPr lang="en-US" sz="1200" dirty="0">
+                <a:solidFill>
+                  <a:srgbClr val="172033"/>
+                </a:solidFill>
+              </a:rPr>
+              <a:t>- Disable systemd-timesyncd and external NTP pool entries.</a:t>
+            </a:r>
           </a:p>
         </p:txBody>
       </p:sp>
@@ -31190,9 +31601,8 @@
                   <a:srgbClr val="FFFFFF"/>
                 </a:solidFill>
               </a:rPr>
-              <a:t>Validation: Use `chronyc tracking`, `chronyc sources -v`, drift tests, and log-correlation checks.</a:t>
-            </a:r>
-            <a:endParaRPr lang="en-US" sz="1200" dirty="0"/>
+              <a:t>Validation: `chronyc tracking` (Reference ID = internal); `chronyc sources -v`; cross-host log timestamp delta &lt; 50ms over 24h.</a:t>
+            </a:r>
           </a:p>
         </p:txBody>
       </p:sp>
@@ -31869,9 +32279,8 @@
                   <a:srgbClr val="172033"/>
                 </a:solidFill>
               </a:rPr>
-              <a:t>- Use enclave-local authoritative DNS or controlled static host maps for mission names.</a:t>
-            </a:r>
-            <a:endParaRPr lang="en-US" sz="1200" dirty="0"/>
+              <a:t>- Local authoritative: `unbound.conf` with `local-zone: "mission.local." static` + signed zone files.</a:t>
+            </a:r>
           </a:p>
           <a:p>
             <a:pPr marL="0" indent="0">
@@ -31883,9 +32292,8 @@
                   <a:srgbClr val="172033"/>
                 </a:solidFill>
               </a:rPr>
-              <a:t>- Restrict resolver configuration through baseline-managed `/etc/resolv.conf`, NetworkManager, or systemd-resolved policy.</a:t>
-            </a:r>
-            <a:endParaRPr lang="en-US" sz="1200" dirty="0"/>
+              <a:t>- /etc/resolv.conf: `nameserver 10.0.0.20\nnameserver 10.0.0.21\noptions edns0 trust-ad`; `chattr +i`.</a:t>
+            </a:r>
           </a:p>
           <a:p>
             <a:pPr marL="0" indent="0">
@@ -31897,9 +32305,8 @@
                   <a:srgbClr val="172033"/>
                 </a:solidFill>
               </a:rPr>
-              <a:t>- Disable fallback public resolvers and unauthorized DNS-over-HTTPS/TLS clients.</a:t>
-            </a:r>
-            <a:endParaRPr lang="en-US" sz="1200" dirty="0"/>
+              <a:t>- Disable systemd-resolved fallback DNS and DoH: `FallbackDNS=` (empty), `DNSOverTLS=no`, `DNSStubListener=no`.</a:t>
+            </a:r>
           </a:p>
           <a:p>
             <a:pPr marL="0" indent="0">
@@ -31911,9 +32318,21 @@
                   <a:srgbClr val="172033"/>
                 </a:solidFill>
               </a:rPr>
-              <a:t>- Log and review DNS changes; pin critical service names where outage impact is unacceptable.</a:t>
-            </a:r>
-            <a:endParaRPr lang="en-US" sz="1200" dirty="0"/>
+              <a:t>- Block external DNS: nftables `udp dport 53 ip daddr != &lt;internal-resolver&gt; drop`.</a:t>
+            </a:r>
+          </a:p>
+          <a:p>
+            <a:pPr marL="0" indent="0">
+              <a:buNone/>
+            </a:pPr>
+            <a:r>
+              <a:rPr lang="en-US" sz="1200" dirty="0">
+                <a:solidFill>
+                  <a:srgbClr val="172033"/>
+                </a:solidFill>
+              </a:rPr>
+              <a:t>- Pin critical names in `/etc/hosts` for break-glass during resolver outage.</a:t>
+            </a:r>
           </a:p>
         </p:txBody>
       </p:sp>
@@ -32360,9 +32779,8 @@
                   <a:srgbClr val="FFFFFF"/>
                 </a:solidFill>
               </a:rPr>
-              <a:t>Validation: Run `resolvectl status` or inspect resolver files, query expected names with `dig`, block external resolution attempts, and test name-service failure modes.</a:t>
-            </a:r>
-            <a:endParaRPr lang="en-US" sz="1200" dirty="0"/>
+              <a:t>Validation: `resolvectl status` shows only internal servers; `dig @8.8.8.8 example.com` blocked by firewall; `dig mission.local` returns expected IP.</a:t>
+            </a:r>
           </a:p>
         </p:txBody>
       </p:sp>
@@ -33039,9 +33457,8 @@
                   <a:srgbClr val="172033"/>
                 </a:solidFill>
               </a:rPr>
-              <a:t>- Use enclave-local centralized identity where available or tightly controlled local accounts.</a:t>
-            </a:r>
-            <a:endParaRPr lang="en-US" sz="1200" dirty="0"/>
+              <a:t>- pam_pwquality (`/etc/security/pwquality.conf`): `minlen=14 dcredit=-1 ucredit=-1 ocredit=-1 lcredit=-1 minclass=4 retry=3 difok=4`.</a:t>
+            </a:r>
           </a:p>
           <a:p>
             <a:pPr marL="0" indent="0">
@@ -33053,9 +33470,8 @@
                   <a:srgbClr val="172033"/>
                 </a:solidFill>
               </a:rPr>
-              <a:t>- Enforce password quality, history, aging, and lockout policy.</a:t>
-            </a:r>
-            <a:endParaRPr lang="en-US" sz="1200" dirty="0"/>
+              <a:t>- pam_faillock: `deny=5 unlock_time=900 fail_interval=900` in `/etc/security/faillock.conf`.</a:t>
+            </a:r>
           </a:p>
           <a:p>
             <a:pPr marL="0" indent="0">
@@ -33067,9 +33483,8 @@
                   <a:srgbClr val="172033"/>
                 </a:solidFill>
               </a:rPr>
-              <a:t>- Disable unused default accounts and require named admin identities.</a:t>
-            </a:r>
-            <a:endParaRPr lang="en-US" sz="1200" dirty="0"/>
+              <a:t>- pam_lastlog `showfailed`; pam_tally2/faillock logged to /var/log/secure.</a:t>
+            </a:r>
           </a:p>
           <a:p>
             <a:pPr marL="0" indent="0">
@@ -33081,9 +33496,21 @@
                   <a:srgbClr val="172033"/>
                 </a:solidFill>
               </a:rPr>
-              <a:t>- Use smart card or local MFA where operationally supportable.</a:t>
-            </a:r>
-            <a:endParaRPr lang="en-US" sz="1200" dirty="0"/>
+              <a:t>- Lock unused accounts: `passwd -l &lt;user&gt;`; set shell `/sbin/nologin`; `chage -E 0` for ex-staff.</a:t>
+            </a:r>
+          </a:p>
+          <a:p>
+            <a:pPr marL="0" indent="0">
+              <a:buNone/>
+            </a:pPr>
+            <a:r>
+              <a:rPr lang="en-US" sz="1200" dirty="0">
+                <a:solidFill>
+                  <a:srgbClr val="172033"/>
+                </a:solidFill>
+              </a:rPr>
+              <a:t>- Smart card: `pam_pkcs11` + `opensc-pkcs11`; CRL pulled via offline import (M28).</a:t>
+            </a:r>
           </a:p>
         </p:txBody>
       </p:sp>
@@ -33530,9 +33957,8 @@
                   <a:srgbClr val="FFFFFF"/>
                 </a:solidFill>
               </a:rPr>
-              <a:t>Validation: Review `/etc/passwd`, `/etc/shadow`, PAM files, password policy, and lockout behavior.</a:t>
-            </a:r>
-            <a:endParaRPr lang="en-US" sz="1200" dirty="0"/>
+              <a:t>Validation: `passwd &lt;user&gt;` rejects weak; 6th wrong attempt -&gt; `faillock --user &lt;u&gt;` shows lock; `awk -F: '$2==""' /etc/shadow` empty.</a:t>
+            </a:r>
           </a:p>
         </p:txBody>
       </p:sp>
@@ -34209,9 +34635,8 @@
                   <a:srgbClr val="172033"/>
                 </a:solidFill>
               </a:rPr>
-              <a:t>- Use named users and role-based sudo groups.</a:t>
-            </a:r>
-            <a:endParaRPr lang="en-US" sz="1200" dirty="0"/>
+              <a:t>- Role-based via `%ops ALL=(ALL) /usr/sbin/systemctl restart mission, /usr/sbin/journalctl -u mission*`.</a:t>
+            </a:r>
           </a:p>
           <a:p>
             <a:pPr marL="0" indent="0">
@@ -34223,9 +34648,8 @@
                   <a:srgbClr val="172033"/>
                 </a:solidFill>
               </a:rPr>
-              <a:t>- Prefer command-specific sudo where maintainable.</a:t>
-            </a:r>
-            <a:endParaRPr lang="en-US" sz="1200" dirty="0"/>
+              <a:t>- Defaults: `Defaults log_input,log_output,iolog_dir=/var/log/sudo-io,timestamp_timeout=5,passwd_tries=3,requiretty`.</a:t>
+            </a:r>
           </a:p>
           <a:p>
             <a:pPr marL="0" indent="0">
@@ -34237,9 +34661,8 @@
                   <a:srgbClr val="172033"/>
                 </a:solidFill>
               </a:rPr>
-              <a:t>- Validate changes with `visudo`.</a:t>
-            </a:r>
-            <a:endParaRPr lang="en-US" sz="1200" dirty="0"/>
+              <a:t>- Forbid `NOPASSWD` for human roles; allow only for narrowly-scoped automation accounts with documented owner.</a:t>
+            </a:r>
           </a:p>
           <a:p>
             <a:pPr marL="0" indent="0">
@@ -34251,9 +34674,21 @@
                   <a:srgbClr val="172033"/>
                 </a:solidFill>
               </a:rPr>
-              <a:t>- Enable sudo logging and I/O logging for sensitive roles where storage allows.</a:t>
-            </a:r>
-            <a:endParaRPr lang="en-US" sz="1200" dirty="0"/>
+              <a:t>- Validate edits: `visudo -cf /etc/sudoers.d/&lt;file&gt;` before deploy; lint via `sudo --validate`.</a:t>
+            </a:r>
+          </a:p>
+          <a:p>
+            <a:pPr marL="0" indent="0">
+              <a:buNone/>
+            </a:pPr>
+            <a:r>
+              <a:rPr lang="en-US" sz="1200" dirty="0">
+                <a:solidFill>
+                  <a:srgbClr val="172033"/>
+                </a:solidFill>
+              </a:rPr>
+              <a:t>- I/O log review weekly for top-10 sensitive commands.</a:t>
+            </a:r>
           </a:p>
         </p:txBody>
       </p:sp>
@@ -34700,9 +35135,8 @@
                   <a:srgbClr val="FFFFFF"/>
                 </a:solidFill>
               </a:rPr>
-              <a:t>Validation: Run `sudo -l -U &lt;user&gt;`, attempt prohibited commands, and verify logs.</a:t>
-            </a:r>
-            <a:endParaRPr lang="en-US" sz="1200" dirty="0"/>
+              <a:t>Validation: `sudo -l -U &lt;user&gt;` matches role; prohibited `sudo -i` denied; `ls /var/log/sudo-io/` shows session-bound transcripts.</a:t>
+            </a:r>
           </a:p>
         </p:txBody>
       </p:sp>
@@ -35379,9 +35813,8 @@
                   <a:srgbClr val="172033"/>
                 </a:solidFill>
               </a:rPr>
-              <a:t>- Use one dedicated account per service or application.</a:t>
-            </a:r>
-            <a:endParaRPr lang="en-US" sz="1200" dirty="0"/>
+              <a:t>- Create: `useradd --system --no-create-home --shell /sbin/nologin --comment 'svc-foo' svc-foo`.</a:t>
+            </a:r>
           </a:p>
           <a:p>
             <a:pPr marL="0" indent="0">
@@ -35393,9 +35826,8 @@
                   <a:srgbClr val="172033"/>
                 </a:solidFill>
               </a:rPr>
-              <a:t>- Set non-login shells and lock passwords.</a:t>
-            </a:r>
-            <a:endParaRPr lang="en-US" sz="1200" dirty="0"/>
+              <a:t>- Lock password: `usermod -L svc-foo`; `passwd -l svc-foo`; expire `chage -E 1 svc-foo`.</a:t>
+            </a:r>
           </a:p>
           <a:p>
             <a:pPr marL="0" indent="0">
@@ -35407,9 +35839,8 @@
                   <a:srgbClr val="172033"/>
                 </a:solidFill>
               </a:rPr>
-              <a:t>- Restrict ownership and group membership.</a:t>
-            </a:r>
-            <a:endParaRPr lang="en-US" sz="1200" dirty="0"/>
+              <a:t>- File ownership scoped: `chown -R svc-foo:svc-foo /var/lib/foo`; modes 0750/0640.</a:t>
+            </a:r>
           </a:p>
           <a:p>
             <a:pPr marL="0" indent="0">
@@ -35421,9 +35852,21 @@
                   <a:srgbClr val="172033"/>
                 </a:solidFill>
               </a:rPr>
-              <a:t>- Pair accounts with systemd sandboxing and MAC policy.</a:t>
-            </a:r>
-            <a:endParaRPr lang="en-US" sz="1200" dirty="0"/>
+              <a:t>- systemd unit: `User=svc-foo`, `Group=svc-foo`, `DynamicUser=yes` where workload allows.</a:t>
+            </a:r>
+          </a:p>
+          <a:p>
+            <a:pPr marL="0" indent="0">
+              <a:buNone/>
+            </a:pPr>
+            <a:r>
+              <a:rPr lang="en-US" sz="1200" dirty="0">
+                <a:solidFill>
+                  <a:srgbClr val="172033"/>
+                </a:solidFill>
+              </a:rPr>
+              <a:t>- Forbid shared service accounts; per-app account is mandatory.</a:t>
+            </a:r>
           </a:p>
         </p:txBody>
       </p:sp>
@@ -35870,9 +36313,8 @@
                   <a:srgbClr val="FFFFFF"/>
                 </a:solidFill>
               </a:rPr>
-              <a:t>Validation: Review `getent passwd`, process ownership, file ownership, and interactive login denial.</a:t>
-            </a:r>
-            <a:endParaRPr lang="en-US" sz="1200" dirty="0"/>
+              <a:t>Validation: `getent passwd svc-foo` shows nologin; `su -s /bin/sh svc-foo` denied; `ps -eo user,cmd | grep &lt;svc&gt;` shows correct UID.</a:t>
+            </a:r>
           </a:p>
         </p:txBody>
       </p:sp>
@@ -36549,9 +36991,8 @@
                   <a:srgbClr val="172033"/>
                 </a:solidFill>
               </a:rPr>
-              <a:t>- Use `NoNewPrivileges=true`, `ProtectSystem=strict`, `ProtectHome=true`, and `PrivateTmp=true`.</a:t>
-            </a:r>
-            <a:endParaRPr lang="en-US" sz="1200" dirty="0"/>
+              <a:t>- Drop-in `/etc/systemd/system/&lt;svc&gt;.d/hardening.conf`:</a:t>
+            </a:r>
           </a:p>
           <a:p>
             <a:pPr marL="0" indent="0">
@@ -36563,9 +37004,8 @@
                   <a:srgbClr val="172033"/>
                 </a:solidFill>
               </a:rPr>
-              <a:t>- Use `PrivateDevices=true`, `RestrictAddressFamilies=`, `RestrictNamespaces=true`, and `ReadWritePaths=`.</a:t>
-            </a:r>
-            <a:endParaRPr lang="en-US" sz="1200" dirty="0"/>
+              <a:t>  `NoNewPrivileges=yes ProtectSystem=strict ProtectHome=yes PrivateTmp=yes PrivateDevices=yes ProtectKernelTunables=yes ProtectKernelModules=yes ProtectKernelLogs=yes ProtectControlGroups=yes`</a:t>
+            </a:r>
           </a:p>
           <a:p>
             <a:pPr marL="0" indent="0">
@@ -36577,9 +37017,8 @@
                   <a:srgbClr val="172033"/>
                 </a:solidFill>
               </a:rPr>
-              <a:t>- Add `MemoryDenyWriteExecute=true`, `LockPersonality=true`, `CapabilityBoundingSet=`, and `SystemCallFilter=` where compatible.</a:t>
-            </a:r>
-            <a:endParaRPr lang="en-US" sz="1200" dirty="0"/>
+              <a:t>- `RestrictAddressFamilies=AF_UNIX AF_INET AF_INET6`; `RestrictNamespaces=yes`; `LockPersonality=yes`; `MemoryDenyWriteExecute=yes`.</a:t>
+            </a:r>
           </a:p>
           <a:p>
             <a:pPr marL="0" indent="0">
@@ -36591,9 +37030,34 @@
                   <a:srgbClr val="172033"/>
                 </a:solidFill>
               </a:rPr>
-              <a:t>- Tune per service instead of applying a blind global profile.</a:t>
-            </a:r>
-            <a:endParaRPr lang="en-US" sz="1200" dirty="0"/>
+              <a:t>- `SystemCallFilter=@system-service` + deny `@privileged @resources @reboot @module @mount @swap`.</a:t>
+            </a:r>
+          </a:p>
+          <a:p>
+            <a:pPr marL="0" indent="0">
+              <a:buNone/>
+            </a:pPr>
+            <a:r>
+              <a:rPr lang="en-US" sz="1200" dirty="0">
+                <a:solidFill>
+                  <a:srgbClr val="172033"/>
+                </a:solidFill>
+              </a:rPr>
+              <a:t>- `CapabilityBoundingSet=` (empty unless required); `ReadWritePaths=` only specific dirs.</a:t>
+            </a:r>
+          </a:p>
+          <a:p>
+            <a:pPr marL="0" indent="0">
+              <a:buNone/>
+            </a:pPr>
+            <a:r>
+              <a:rPr lang="en-US" sz="1200" dirty="0">
+                <a:solidFill>
+                  <a:srgbClr val="172033"/>
+                </a:solidFill>
+              </a:rPr>
+              <a:t>- Aim: `systemd-analyze security &lt;svc&gt;` reports exposure &lt; 2.5.</a:t>
+            </a:r>
           </a:p>
         </p:txBody>
       </p:sp>
@@ -37040,9 +37504,8 @@
                   <a:srgbClr val="FFFFFF"/>
                 </a:solidFill>
               </a:rPr>
-              <a:t>Validation: Run `systemd-analyze security &lt;service&gt;`, lifecycle tests, and negative access tests.</a:t>
-            </a:r>
-            <a:endParaRPr lang="en-US" sz="1200" dirty="0"/>
+              <a:t>Validation: `systemd-analyze security &lt;svc&gt;` shows exposure score and which knobs are unset; negative tests confirm denied syscall/path access.</a:t>
+            </a:r>
           </a:p>
         </p:txBody>
       </p:sp>
@@ -37719,9 +38182,8 @@
                   <a:srgbClr val="172033"/>
                 </a:solidFill>
               </a:rPr>
-              <a:t>- Audit identity changes, privilege elevation, module loads, time changes, software installs, and critical file access.</a:t>
-            </a:r>
-            <a:endParaRPr lang="en-US" sz="1200" dirty="0"/>
+              <a:t>- /etc/audit/rules.d/00-base.rules: `-w /etc/passwd -p wa -k identity`, `-w /etc/shadow -p wa -k identity`, `-w /etc/sudoers -p wa -k privesc`.</a:t>
+            </a:r>
           </a:p>
           <a:p>
             <a:pPr marL="0" indent="0">
@@ -37733,9 +38195,8 @@
                   <a:srgbClr val="172033"/>
                 </a:solidFill>
               </a:rPr>
-              <a:t>- Configure journald persistent storage with size limits.</a:t>
-            </a:r>
-            <a:endParaRPr lang="en-US" sz="1200" dirty="0"/>
+              <a:t>- syscall: `-a always,exit -F arch=b64 -S execve -F uid&gt;=1000 -k user-cmd`; modules `-w /sbin/insmod -p x -k modules`.</a:t>
+            </a:r>
           </a:p>
           <a:p>
             <a:pPr marL="0" indent="0">
@@ -37747,9 +38208,8 @@
                   <a:srgbClr val="172033"/>
                 </a:solidFill>
               </a:rPr>
-              <a:t>- Export logs to an internal collector or controlled offline archive.</a:t>
-            </a:r>
-            <a:endParaRPr lang="en-US" sz="1200" dirty="0"/>
+              <a:t>- /etc/audit/auditd.conf: `max_log_file=200`, `space_left_action=email`, `disk_full_action=halt`, `flush=incremental_async`.</a:t>
+            </a:r>
           </a:p>
           <a:p>
             <a:pPr marL="0" indent="0">
@@ -37761,9 +38221,21 @@
                   <a:srgbClr val="172033"/>
                 </a:solidFill>
               </a:rPr>
-              <a:t>- Use append-only or WORM-like storage where feasible.</a:t>
-            </a:r>
-            <a:endParaRPr lang="en-US" sz="1200" dirty="0"/>
+              <a:t>- journald: `Storage=persistent`, `SystemMaxUse=1G`, `Seal=yes`, `ForwardToSyslog=no`.</a:t>
+            </a:r>
+          </a:p>
+          <a:p>
+            <a:pPr marL="0" indent="0">
+              <a:buNone/>
+            </a:pPr>
+            <a:r>
+              <a:rPr lang="en-US" sz="1200" dirty="0">
+                <a:solidFill>
+                  <a:srgbClr val="172033"/>
+                </a:solidFill>
+              </a:rPr>
+              <a:t>- Export: hourly `aureport` -&gt; signed bundle -&gt; one-way diode/USB to offline collector.</a:t>
+            </a:r>
           </a:p>
         </p:txBody>
       </p:sp>
@@ -38210,9 +38682,8 @@
                   <a:srgbClr val="FFFFFF"/>
                 </a:solidFill>
               </a:rPr>
-              <a:t>Validation: Use `auditctl -s`, `auditctl -l`, generate test events, and verify log rotation/export integrity.</a:t>
-            </a:r>
-            <a:endParaRPr lang="en-US" sz="1200" dirty="0"/>
+              <a:t>Validation: `auditctl -l` matches CM file; `auditctl -s` enabled+immutable=1; testing `useradd test; userdel test` produces audit events with key `identity`.</a:t>
+            </a:r>
           </a:p>
         </p:txBody>
       </p:sp>
@@ -38889,9 +39360,8 @@
                   <a:srgbClr val="172033"/>
                 </a:solidFill>
               </a:rPr>
-              <a:t>- Use AIDE, IMA/EVM, vendor tooling, or equivalent.</a:t>
-            </a:r>
-            <a:endParaRPr lang="en-US" sz="1200" dirty="0"/>
+              <a:t>- AIDE: `/etc/aide.conf` watches `/boot /etc /usr/sbin /usr/bin /sbin /bin /lib /lib64 /opt /root` with sha512+sha256.</a:t>
+            </a:r>
           </a:p>
           <a:p>
             <a:pPr marL="0" indent="0">
@@ -38903,9 +39373,8 @@
                   <a:srgbClr val="172033"/>
                 </a:solidFill>
               </a:rPr>
-              <a:t>- Build baselines from trusted golden images.</a:t>
-            </a:r>
-            <a:endParaRPr lang="en-US" sz="1200" dirty="0"/>
+              <a:t>- Initialize: `aide --init`; move db to read-only media; `aide --check` daily via systemd timer.</a:t>
+            </a:r>
           </a:p>
           <a:p>
             <a:pPr marL="0" indent="0">
@@ -38917,9 +39386,8 @@
                   <a:srgbClr val="172033"/>
                 </a:solidFill>
               </a:rPr>
-              <a:t>- Monitor critical paths and store baselines offline or on protected media.</a:t>
-            </a:r>
-            <a:endParaRPr lang="en-US" sz="1200" dirty="0"/>
+              <a:t>- IMA: cmdline `ima_policy=tcb ima_appraise=fix` (then enforce); xattrs signed by org key.</a:t>
+            </a:r>
           </a:p>
           <a:p>
             <a:pPr marL="0" indent="0">
@@ -38931,9 +39399,21 @@
                   <a:srgbClr val="172033"/>
                 </a:solidFill>
               </a:rPr>
-              <a:t>- Re-baseline only through change control.</a:t>
-            </a:r>
-            <a:endParaRPr lang="en-US" sz="1200" dirty="0"/>
+              <a:t>- Re-baseline only via documented CM ticket; capture pre/post hashes.</a:t>
+            </a:r>
+          </a:p>
+          <a:p>
+            <a:pPr marL="0" indent="0">
+              <a:buNone/>
+            </a:pPr>
+            <a:r>
+              <a:rPr lang="en-US" sz="1200" dirty="0">
+                <a:solidFill>
+                  <a:srgbClr val="172033"/>
+                </a:solidFill>
+              </a:rPr>
+              <a:t>- Pipe alerts to auditd via `--report-to-stdout` -&gt; logger -&gt; SIEM (or offline collector).</a:t>
+            </a:r>
           </a:p>
         </p:txBody>
       </p:sp>
@@ -39380,9 +39860,8 @@
                   <a:srgbClr val="FFFFFF"/>
                 </a:solidFill>
               </a:rPr>
-              <a:t>Validation: Run baseline scan, modify test files in staging, and verify detection.</a:t>
-            </a:r>
-            <a:endParaRPr lang="en-US" sz="1200" dirty="0"/>
+              <a:t>Validation: `aide --check` clean on baseline; modify a watched file -&gt; next run reports diff; `getfattr -d -m security.ima /usr/bin/sshd` shows signature.</a:t>
+            </a:r>
           </a:p>
         </p:txBody>
       </p:sp>
@@ -40059,9 +40538,8 @@
                   <a:srgbClr val="172033"/>
                 </a:solidFill>
               </a:rPr>
-              <a:t>- Use a dedicated intake station.</a:t>
-            </a:r>
-            <a:endParaRPr lang="en-US" sz="1200" dirty="0"/>
+              <a:t>- Intake station: dedicated airgapped laptop, ClamAV + YARA + sha256, signature DB updated weekly via signed bundle.</a:t>
+            </a:r>
           </a:p>
           <a:p>
             <a:pPr marL="0" indent="0">
@@ -40073,9 +40551,8 @@
                   <a:srgbClr val="172033"/>
                 </a:solidFill>
               </a:rPr>
-              <a:t>- Scan imported files before enclave transfer.</a:t>
-            </a:r>
-            <a:endParaRPr lang="en-US" sz="1200" dirty="0"/>
+              <a:t>- Workflow: receive media -&gt; hash -&gt; `clamscan --bytecode-unsigned=no -ri /media`; `yara -r rules/ /media`; quarantine on hit.</a:t>
+            </a:r>
           </a:p>
           <a:p>
             <a:pPr marL="0" indent="0">
@@ -40087,9 +40564,8 @@
                   <a:srgbClr val="172033"/>
                 </a:solidFill>
               </a:rPr>
-              <a:t>- Maintain offline signature update workflow.</a:t>
-            </a:r>
-            <a:endParaRPr lang="en-US" sz="1200" dirty="0"/>
+              <a:t>- File-type allowlist: `.rpm .deb .tar.gz .tar.xz .iso .sig`; everything else rejected.</a:t>
+            </a:r>
           </a:p>
           <a:p>
             <a:pPr marL="0" indent="0">
@@ -40101,9 +40577,21 @@
                   <a:srgbClr val="172033"/>
                 </a:solidFill>
               </a:rPr>
-              <a:t>- Prefer signed artifacts and allowlisted file types.</a:t>
-            </a:r>
-            <a:endParaRPr lang="en-US" sz="1200" dirty="0"/>
+              <a:t>- Strip macros from imported docs; convert to PDF/A; re-render images.</a:t>
+            </a:r>
+          </a:p>
+          <a:p>
+            <a:pPr marL="0" indent="0">
+              <a:buNone/>
+            </a:pPr>
+            <a:r>
+              <a:rPr lang="en-US" sz="1200" dirty="0">
+                <a:solidFill>
+                  <a:srgbClr val="172033"/>
+                </a:solidFill>
+              </a:rPr>
+              <a:t>- Chain of custody: intake log signed by operator; one-way transfer to enclave.</a:t>
+            </a:r>
           </a:p>
         </p:txBody>
       </p:sp>
@@ -40550,9 +41038,8 @@
                   <a:srgbClr val="FFFFFF"/>
                 </a:solidFill>
               </a:rPr>
-              <a:t>Validation: Confirm signature age, scan logs, quarantine behavior, and harmless test-detection where permitted.</a:t>
-            </a:r>
-            <a:endParaRPr lang="en-US" sz="1200" dirty="0"/>
+              <a:t>Validation: EICAR test file detected; oversized/unknown type rejected; signature DB age &lt;= 7 days; `clamdtop` shows daemon healthy.</a:t>
+            </a:r>
           </a:p>
         </p:txBody>
       </p:sp>
@@ -41229,9 +41716,8 @@
                   <a:srgbClr val="172033"/>
                 </a:solidFill>
               </a:rPr>
-              <a:t>- Acquire packages externally and verify provenance.</a:t>
-            </a:r>
-            <a:endParaRPr lang="en-US" sz="1200" dirty="0"/>
+              <a:t>- Stages: external acquire -&gt; hash -&gt; sign -&gt; intake-scan -&gt; staging repo -&gt; lab deploy -&gt; prod.</a:t>
+            </a:r>
           </a:p>
           <a:p>
             <a:pPr marL="0" indent="0">
@@ -41243,9 +41729,8 @@
                   <a:srgbClr val="172033"/>
                 </a:solidFill>
               </a:rPr>
-              <a:t>- Scan, import, and stage into offline repositories.</a:t>
-            </a:r>
-            <a:endParaRPr lang="en-US" sz="1200" dirty="0"/>
+              <a:t>- Lab: identical hardware tier; run `fio`, `iperf3`, `cyclictest`, `stress-ng`, app smoke tests pre/post.</a:t>
+            </a:r>
           </a:p>
           <a:p>
             <a:pPr marL="0" indent="0">
@@ -41257,9 +41742,8 @@
                   <a:srgbClr val="172033"/>
                 </a:solidFill>
               </a:rPr>
-              <a:t>- Deploy first to representative lab hardware.</a:t>
-            </a:r>
-            <a:endParaRPr lang="en-US" sz="1200" dirty="0"/>
+              <a:t>- Approval gate: signed test report; rollback artifact (snapshot or A/B partition slot) created before prod.</a:t>
+            </a:r>
           </a:p>
           <a:p>
             <a:pPr marL="0" indent="0">
@@ -41271,9 +41755,21 @@
                   <a:srgbClr val="172033"/>
                 </a:solidFill>
               </a:rPr>
-              <a:t>- Run functional, security, and performance regression tests before production rollout.</a:t>
-            </a:r>
-            <a:endParaRPr lang="en-US" sz="1200" dirty="0"/>
+              <a:t>- Emergency path: pre-defined CVSS &gt;= 9 lane bypasses lab with explicit waiver (M32).</a:t>
+            </a:r>
+          </a:p>
+          <a:p>
+            <a:pPr marL="0" indent="0">
+              <a:buNone/>
+            </a:pPr>
+            <a:r>
+              <a:rPr lang="en-US" sz="1200" dirty="0">
+                <a:solidFill>
+                  <a:srgbClr val="172033"/>
+                </a:solidFill>
+              </a:rPr>
+              <a:t>- Track per patch: CVE list, components, regression evidence, rollback steps.</a:t>
+            </a:r>
           </a:p>
         </p:txBody>
       </p:sp>
@@ -41720,9 +42216,8 @@
                   <a:srgbClr val="FFFFFF"/>
                 </a:solidFill>
               </a:rPr>
-              <a:t>Validation: Verify signatures, compare patch manifests, run regression tests, scan with offline CVE data, and rehearse rollback.</a:t>
-            </a:r>
-            <a:endParaRPr lang="en-US" sz="1200" dirty="0"/>
+              <a:t>Validation: dry-run rollback in staging; signed-only repos enforce; `dnf history rollback &lt;id&gt;` succeeds; performance delta within budget.</a:t>
+            </a:r>
           </a:p>
         </p:txBody>
       </p:sp>
@@ -41944,7 +42439,7 @@
         <p:spPr>
           <a:xfrm>
             <a:off x="1143000" y="1417320"/>
-            <a:ext cx="9875520" cy="384048"/>
+            <a:ext cx="6785235" cy="384048"/>
           </a:xfrm>
           <a:prstGeom prst="roundRect">
             <a:avLst>
@@ -42047,7 +42542,7 @@
         <p:spPr>
           <a:xfrm>
             <a:off x="1394460" y="1856232"/>
-            <a:ext cx="9372600" cy="384048"/>
+            <a:ext cx="6439690" cy="384048"/>
           </a:xfrm>
           <a:prstGeom prst="roundRect">
             <a:avLst>
@@ -42150,7 +42645,7 @@
         <p:spPr>
           <a:xfrm>
             <a:off x="1645920" y="2295144"/>
-            <a:ext cx="8869680" cy="384048"/>
+            <a:ext cx="6094146" cy="384048"/>
           </a:xfrm>
           <a:prstGeom prst="roundRect">
             <a:avLst>
@@ -42253,7 +42748,7 @@
         <p:spPr>
           <a:xfrm>
             <a:off x="1897380" y="2734056"/>
-            <a:ext cx="8366760" cy="384048"/>
+            <a:ext cx="5748602" cy="384048"/>
           </a:xfrm>
           <a:prstGeom prst="roundRect">
             <a:avLst>
@@ -42356,7 +42851,7 @@
         <p:spPr>
           <a:xfrm>
             <a:off x="2148840" y="3172968"/>
-            <a:ext cx="7863840" cy="384048"/>
+            <a:ext cx="5403057" cy="384048"/>
           </a:xfrm>
           <a:prstGeom prst="roundRect">
             <a:avLst>
@@ -42459,7 +42954,7 @@
         <p:spPr>
           <a:xfrm>
             <a:off x="2400300" y="3611880"/>
-            <a:ext cx="7360920" cy="384048"/>
+            <a:ext cx="5057513" cy="384048"/>
           </a:xfrm>
           <a:prstGeom prst="roundRect">
             <a:avLst>
@@ -42562,7 +43057,7 @@
         <p:spPr>
           <a:xfrm>
             <a:off x="2651760" y="4050792"/>
-            <a:ext cx="6858000" cy="384048"/>
+            <a:ext cx="4713774" cy="384048"/>
           </a:xfrm>
           <a:prstGeom prst="roundRect">
             <a:avLst>
@@ -42665,7 +43160,7 @@
         <p:spPr>
           <a:xfrm>
             <a:off x="2903220" y="4489704"/>
-            <a:ext cx="6355080" cy="384048"/>
+            <a:ext cx="4366424" cy="384048"/>
           </a:xfrm>
           <a:prstGeom prst="roundRect">
             <a:avLst>
@@ -42767,8 +43262,8 @@
         </p:nvSpPr>
         <p:spPr>
           <a:xfrm>
-            <a:off x="6080760" y="1005840"/>
-            <a:ext cx="0" cy="4389120"/>
+            <a:off x="6428232" y="1143000"/>
+            <a:ext cx="0" cy="4058174"/>
           </a:xfrm>
           <a:prstGeom prst="line">
             <a:avLst/>
@@ -42828,8 +43323,8 @@
         </p:nvSpPr>
         <p:spPr>
           <a:xfrm>
-            <a:off x="685800" y="5532120"/>
-            <a:ext cx="2834640" cy="658368"/>
+            <a:off x="685800" y="5285232"/>
+            <a:ext cx="2834640" cy="905256"/>
           </a:xfrm>
           <a:prstGeom prst="roundRect">
             <a:avLst>
@@ -42880,7 +43375,7 @@
         </p:nvSpPr>
         <p:spPr>
           <a:xfrm>
-            <a:off x="886968" y="5678424"/>
+            <a:off x="932688" y="5467860"/>
             <a:ext cx="2514600" cy="201168"/>
           </a:xfrm>
           <a:prstGeom prst="rect">
@@ -42918,8 +43413,8 @@
         </p:nvSpPr>
         <p:spPr>
           <a:xfrm>
-            <a:off x="886968" y="5971032"/>
-            <a:ext cx="2523744" cy="128016"/>
+            <a:off x="932688" y="5760468"/>
+            <a:ext cx="2523744" cy="402336"/>
           </a:xfrm>
           <a:prstGeom prst="rect">
             <a:avLst/>
@@ -42956,8 +43451,8 @@
         </p:nvSpPr>
         <p:spPr>
           <a:xfrm>
-            <a:off x="3703320" y="5532120"/>
-            <a:ext cx="2834640" cy="658368"/>
+            <a:off x="3703320" y="5285232"/>
+            <a:ext cx="2834640" cy="905256"/>
           </a:xfrm>
           <a:prstGeom prst="roundRect">
             <a:avLst>
@@ -43008,7 +43503,7 @@
         </p:nvSpPr>
         <p:spPr>
           <a:xfrm>
-            <a:off x="3904488" y="5678424"/>
+            <a:off x="3950208" y="5467860"/>
             <a:ext cx="2514600" cy="201168"/>
           </a:xfrm>
           <a:prstGeom prst="rect">
@@ -43046,8 +43541,8 @@
         </p:nvSpPr>
         <p:spPr>
           <a:xfrm>
-            <a:off x="3904488" y="5971032"/>
-            <a:ext cx="2523744" cy="128016"/>
+            <a:off x="3950208" y="5760468"/>
+            <a:ext cx="2523744" cy="463324"/>
           </a:xfrm>
           <a:prstGeom prst="rect">
             <a:avLst/>
@@ -43084,8 +43579,8 @@
         </p:nvSpPr>
         <p:spPr>
           <a:xfrm>
-            <a:off x="6720840" y="5532120"/>
-            <a:ext cx="2834640" cy="658368"/>
+            <a:off x="6720840" y="5285232"/>
+            <a:ext cx="2834640" cy="905256"/>
           </a:xfrm>
           <a:prstGeom prst="roundRect">
             <a:avLst>
@@ -43136,7 +43631,7 @@
         </p:nvSpPr>
         <p:spPr>
           <a:xfrm>
-            <a:off x="6922008" y="5678424"/>
+            <a:off x="6967728" y="5467860"/>
             <a:ext cx="2514600" cy="201168"/>
           </a:xfrm>
           <a:prstGeom prst="rect">
@@ -43174,8 +43669,8 @@
         </p:nvSpPr>
         <p:spPr>
           <a:xfrm>
-            <a:off x="6922008" y="5971032"/>
-            <a:ext cx="2523744" cy="128016"/>
+            <a:off x="6967728" y="5760468"/>
+            <a:ext cx="2523744" cy="463324"/>
           </a:xfrm>
           <a:prstGeom prst="rect">
             <a:avLst/>
@@ -43877,9 +44372,8 @@
                   <a:srgbClr val="172033"/>
                 </a:solidFill>
               </a:rPr>
-              <a:t>- Maintain signed golden images.</a:t>
-            </a:r>
-            <a:endParaRPr lang="en-US" sz="1200" dirty="0"/>
+              <a:t>- Golden image: signed (`gpg --detach-sign image.qcow2`); dm-verity hash captured per release.</a:t>
+            </a:r>
           </a:p>
           <a:p>
             <a:pPr marL="0" indent="0">
@@ -43891,9 +44385,8 @@
                   <a:srgbClr val="172033"/>
                 </a:solidFill>
               </a:rPr>
-              <a:t>- Separate OS, application, configuration, and data backups.</a:t>
-            </a:r>
-            <a:endParaRPr lang="en-US" sz="1200" dirty="0"/>
+              <a:t>- Backups: restic + repo on WORM media (`restic backup --tag prod /var /etc /root`); password in escrow.</a:t>
+            </a:r>
           </a:p>
           <a:p>
             <a:pPr marL="0" indent="0">
@@ -43905,9 +44398,8 @@
                   <a:srgbClr val="172033"/>
                 </a:solidFill>
               </a:rPr>
-              <a:t>- Use immutable or offline backup copies.</a:t>
-            </a:r>
-            <a:endParaRPr lang="en-US" sz="1200" dirty="0"/>
+              <a:t>- A/B partition slots: `bootctl set-default &lt;slot&gt;`; rollback via `bootctl set-default &lt;other&gt;` and reboot.</a:t>
+            </a:r>
           </a:p>
           <a:p>
             <a:pPr marL="0" indent="0">
@@ -43919,9 +44411,21 @@
                   <a:srgbClr val="172033"/>
                 </a:solidFill>
               </a:rPr>
-              <a:t>- Test bare-metal restore and application data consistency.</a:t>
-            </a:r>
-            <a:endParaRPr lang="en-US" sz="1200" dirty="0"/>
+              <a:t>- Bare-metal restore drill quarterly; verify image hash + boot + service health.</a:t>
+            </a:r>
+          </a:p>
+          <a:p>
+            <a:pPr marL="0" indent="0">
+              <a:buNone/>
+            </a:pPr>
+            <a:r>
+              <a:rPr lang="en-US" sz="1200" dirty="0">
+                <a:solidFill>
+                  <a:srgbClr val="172033"/>
+                </a:solidFill>
+              </a:rPr>
+              <a:t>- Separate retention: OS (latest 3 releases), config (90 days), data (per data-classification policy).</a:t>
+            </a:r>
           </a:p>
         </p:txBody>
       </p:sp>
@@ -44368,9 +44872,8 @@
                   <a:srgbClr val="FFFFFF"/>
                 </a:solidFill>
               </a:rPr>
-              <a:t>Validation: Perform restore tests, hash images, boot restored systems, and verify application consistency.</a:t>
-            </a:r>
-            <a:endParaRPr lang="en-US" sz="1200" dirty="0"/>
+              <a:t>Validation: `restic check`; restore to lab host -&gt; hash match; `tpm2_eventlog` after restore matches golden PCRs.</a:t>
+            </a:r>
           </a:p>
         </p:txBody>
       </p:sp>
@@ -45047,9 +45550,8 @@
                   <a:srgbClr val="172033"/>
                 </a:solidFill>
               </a:rPr>
-              <a:t>- Define baseline metrics before hardening.</a:t>
-            </a:r>
-            <a:endParaRPr lang="en-US" sz="1200" dirty="0"/>
+              <a:t>- Reference workload: `fio --rw=randrw --bs=4k --iodepth=32 --numjobs=4 --size=4G --runtime=300 --name=mission`.</a:t>
+            </a:r>
           </a:p>
           <a:p>
             <a:pPr marL="0" indent="0">
@@ -45061,9 +45563,8 @@
                   <a:srgbClr val="172033"/>
                 </a:solidFill>
               </a:rPr>
-              <a:t>- Measure CPU, memory, IO, network, boot time, service startup, failover, and application-specific mission metrics.</a:t>
-            </a:r>
-            <a:endParaRPr lang="en-US" sz="1200" dirty="0"/>
+              <a:t>- Network: `iperf3 -c &lt;peer&gt; -t 60 -P 4 --json`; latency `cyclictest -p99 -l 1000000`.</a:t>
+            </a:r>
           </a:p>
           <a:p>
             <a:pPr marL="0" indent="0">
@@ -45075,9 +45576,8 @@
                   <a:srgbClr val="172033"/>
                 </a:solidFill>
               </a:rPr>
-              <a:t>- Test hardening bundles independently where feasible.</a:t>
-            </a:r>
-            <a:endParaRPr lang="en-US" sz="1200" dirty="0"/>
+              <a:t>- Boot: `systemd-analyze` &lt; target; service start `systemd-analyze blame | head -20`.</a:t>
+            </a:r>
           </a:p>
           <a:p>
             <a:pPr marL="0" indent="0">
@@ -45089,9 +45589,21 @@
                   <a:srgbClr val="172033"/>
                 </a:solidFill>
               </a:rPr>
-              <a:t>- Record firmware, kernel, package, and configuration versions with results.</a:t>
-            </a:r>
-            <a:endParaRPr lang="en-US" sz="1200" dirty="0"/>
+              <a:t>- Acceptance: &lt;= 5% regression on p99 latency, throughput, boot, failover unless waived.</a:t>
+            </a:r>
+          </a:p>
+          <a:p>
+            <a:pPr marL="0" indent="0">
+              <a:buNone/>
+            </a:pPr>
+            <a:r>
+              <a:rPr lang="en-US" sz="1200" dirty="0">
+                <a:solidFill>
+                  <a:srgbClr val="172033"/>
+                </a:solidFill>
+              </a:rPr>
+              <a:t>- Bundle each hardening change separately first; combined run last.</a:t>
+            </a:r>
           </a:p>
         </p:txBody>
       </p:sp>
@@ -45538,9 +46050,8 @@
                   <a:srgbClr val="FFFFFF"/>
                 </a:solidFill>
               </a:rPr>
-              <a:t>Validation: Use `fio`, `iperf3`, `stress-ng`, `cyclictest`, and mission simulators against acceptance thresholds.</a:t>
-            </a:r>
-            <a:endParaRPr lang="en-US" sz="1200" dirty="0"/>
+              <a:t>Validation: pre/post benchmark JSON in artifact repo; tagged with kernel+config hash; CI gate refuses merge if regression &gt; threshold.</a:t>
+            </a:r>
           </a:p>
         </p:txBody>
       </p:sp>
@@ -46217,9 +46728,8 @@
                   <a:srgbClr val="172033"/>
                 </a:solidFill>
               </a:rPr>
-              <a:t>- Document waived control, affected system, owner, risk, compensating controls, expiration, and approval authority.</a:t>
-            </a:r>
-            <a:endParaRPr lang="en-US" sz="1200" dirty="0"/>
+              <a:t>- Template fields: control, system, owner, risk, threat scenario, compensating controls, expiry (&lt;= 12 mo), approver, signature.</a:t>
+            </a:r>
           </a:p>
           <a:p>
             <a:pPr marL="0" indent="0">
@@ -46231,9 +46741,8 @@
                   <a:srgbClr val="172033"/>
                 </a:solidFill>
               </a:rPr>
-              <a:t>- Require performance or availability evidence for mission-driven exceptions.</a:t>
-            </a:r>
-            <a:endParaRPr lang="en-US" sz="1200" dirty="0"/>
+              <a:t>- Stored as `git`-tracked YAML in offline CM repo with hash chain (no edits, only new versions).</a:t>
+            </a:r>
           </a:p>
           <a:p>
             <a:pPr marL="0" indent="0">
@@ -46245,9 +46754,8 @@
                   <a:srgbClr val="172033"/>
                 </a:solidFill>
               </a:rPr>
-              <a:t>- Track expiration and retest dates.</a:t>
-            </a:r>
-            <a:endParaRPr lang="en-US" sz="1200" dirty="0"/>
+              <a:t>- Quarterly review: expired waivers auto-flagged; compensating controls re-tested.</a:t>
+            </a:r>
           </a:p>
           <a:p>
             <a:pPr marL="0" indent="0">
@@ -46259,9 +46767,21 @@
                   <a:srgbClr val="172033"/>
                 </a:solidFill>
               </a:rPr>
-              <a:t>- Compare actual configuration against approved waiver list.</a:t>
-            </a:r>
-            <a:endParaRPr lang="en-US" sz="1200" dirty="0"/>
+              <a:t>- Compare actual config to waiver register: `oscap` profile + custom audit script -&gt; diff.</a:t>
+            </a:r>
+          </a:p>
+          <a:p>
+            <a:pPr marL="0" indent="0">
+              <a:buNone/>
+            </a:pPr>
+            <a:r>
+              <a:rPr lang="en-US" sz="1200" dirty="0">
+                <a:solidFill>
+                  <a:srgbClr val="172033"/>
+                </a:solidFill>
+              </a:rPr>
+              <a:t>- Permanent waivers re-classified as accepted residual risk in accreditation package.</a:t>
+            </a:r>
           </a:p>
         </p:txBody>
       </p:sp>
@@ -46708,9 +47228,8 @@
                   <a:srgbClr val="FFFFFF"/>
                 </a:solidFill>
               </a:rPr>
-              <a:t>Validation: Review waivers periodically, verify compensating controls, and close expired exceptions.</a:t>
-            </a:r>
-            <a:endParaRPr lang="en-US" sz="1200" dirty="0"/>
+              <a:t>Validation: `git log --follow waivers/`; `oscap-evaluator` diff vs waiver list; expired count = 0 at audit checkpoint.</a:t>
+            </a:r>
           </a:p>
         </p:txBody>
       </p:sp>
@@ -46795,6 +47314,1087 @@
 </file>
 
 <file path=ppt/slides/slide43.xml><?xml version="1.0" encoding="utf-8"?>
+<p:sld xmlns:a="http://schemas.openxmlformats.org/drawingml/2006/main" xmlns:r="http://schemas.openxmlformats.org/officeDocument/2006/relationships" xmlns:p="http://schemas.openxmlformats.org/presentationml/2006/main">
+  <p:cSld>
+    <p:spTree>
+      <p:nvGrpSpPr>
+        <p:cNvPr id="1" name=""/>
+        <p:cNvGrpSpPr/>
+        <p:nvPr/>
+      </p:nvGrpSpPr>
+      <p:grpSpPr>
+        <a:xfrm>
+          <a:off x="0" y="0"/>
+          <a:ext cx="0" cy="0"/>
+          <a:chOff x="0" y="0"/>
+          <a:chExt cx="0" cy="0"/>
+        </a:xfrm>
+      </p:grpSpPr>
+      <p:sp>
+        <p:nvSpPr>
+          <p:cNvPr id="2" name="Shape 0"/>
+          <p:cNvSpPr/>
+          <p:nvPr/>
+        </p:nvSpPr>
+        <p:spPr>
+          <a:xfrm>
+            <a:off x="0" y="0"/>
+            <a:ext cx="12191695" cy="109728"/>
+          </a:xfrm>
+          <a:prstGeom prst="rect">
+            <a:avLst/>
+          </a:prstGeom>
+          <a:solidFill>
+            <a:srgbClr val="00A896"/>
+          </a:solidFill>
+          <a:ln w="12700">
+            <a:solidFill>
+              <a:srgbClr val="00A896"/>
+            </a:solidFill>
+            <a:prstDash val="solid"/>
+          </a:ln>
+        </p:spPr>
+      </p:sp>
+      <p:sp>
+        <p:nvSpPr>
+          <p:cNvPr id="3" name="Text 1"/>
+          <p:cNvSpPr/>
+          <p:nvPr/>
+        </p:nvSpPr>
+        <p:spPr>
+          <a:xfrm>
+            <a:off x="502920" y="320040"/>
+            <a:ext cx="9784080" cy="502920"/>
+          </a:xfrm>
+          <a:prstGeom prst="rect">
+            <a:avLst/>
+          </a:prstGeom>
+          <a:noFill/>
+          <a:ln/>
+        </p:spPr>
+        <p:txBody>
+          <a:bodyPr wrap="square" lIns="0" tIns="0" rIns="0" bIns="0" rtlCol="0" anchor="ctr">
+            <a:normAutofit/>
+          </a:bodyPr>
+          <a:lstStyle/>
+          <a:p>
+            <a:pPr marL="0" indent="0">
+              <a:buNone/>
+            </a:pPr>
+            <a:r>
+              <a:t>Appliance Pattern — Image-less LXC / nspawn</a:t>
+            </a:r>
+            <a:endParaRPr lang="en-US" sz="2700" dirty="0"/>
+          </a:p>
+        </p:txBody>
+      </p:sp>
+      <p:sp>
+        <p:nvSpPr>
+          <p:cNvPr id="4" name="Text 2"/>
+          <p:cNvSpPr/>
+          <p:nvPr/>
+        </p:nvSpPr>
+        <p:spPr>
+          <a:xfrm>
+            <a:off x="521208" y="804672"/>
+            <a:ext cx="10424160" cy="292608"/>
+          </a:xfrm>
+          <a:prstGeom prst="rect">
+            <a:avLst/>
+          </a:prstGeom>
+          <a:noFill/>
+          <a:ln/>
+        </p:spPr>
+        <p:txBody>
+          <a:bodyPr wrap="square" lIns="0" tIns="0" rIns="0" bIns="0" rtlCol="0" anchor="ctr">
+            <a:normAutofit/>
+          </a:bodyPr>
+          <a:lstStyle/>
+          <a:p>
+            <a:pPr marL="0" indent="0">
+              <a:buNone/>
+            </a:pPr>
+            <a:r>
+              <a:t>Force every workload into a container; keep the host bare. No OCI build chain required.</a:t>
+            </a:r>
+            <a:endParaRPr lang="en-US" sz="1200" dirty="0"/>
+          </a:p>
+        </p:txBody>
+      </p:sp>
+      <p:sp>
+        <p:nvSpPr>
+          <p:cNvPr id="5" name="Shape 3"/>
+          <p:cNvSpPr/>
+          <p:nvPr/>
+        </p:nvSpPr>
+        <p:spPr>
+          <a:xfrm>
+            <a:off x="10241280" y="329184"/>
+            <a:ext cx="1417320" cy="256032"/>
+          </a:xfrm>
+          <a:prstGeom prst="roundRect">
+            <a:avLst>
+              <a:gd name="adj" fmla="val 14286"/>
+            </a:avLst>
+          </a:prstGeom>
+          <a:solidFill>
+            <a:srgbClr val="00A896"/>
+          </a:solidFill>
+          <a:ln w="12700">
+            <a:solidFill>
+              <a:srgbClr val="00A896"/>
+            </a:solidFill>
+            <a:prstDash val="solid"/>
+          </a:ln>
+        </p:spPr>
+      </p:sp>
+      <p:sp>
+        <p:nvSpPr>
+          <p:cNvPr id="6" name="Text 4"/>
+          <p:cNvSpPr/>
+          <p:nvPr/>
+        </p:nvSpPr>
+        <p:spPr>
+          <a:xfrm>
+            <a:off x="10314432" y="384048"/>
+            <a:ext cx="1271016" cy="91440"/>
+          </a:xfrm>
+          <a:prstGeom prst="rect">
+            <a:avLst/>
+          </a:prstGeom>
+          <a:noFill/>
+          <a:ln/>
+        </p:spPr>
+        <p:txBody>
+          <a:bodyPr wrap="square" lIns="0" tIns="0" rIns="0" bIns="0" rtlCol="0" anchor="ctr">
+            <a:normAutofit/>
+          </a:bodyPr>
+          <a:lstStyle/>
+          <a:p>
+            <a:pPr marL="0" indent="0" algn="ctr">
+              <a:buNone/>
+            </a:pPr>
+            <a:r>
+              <a:t>Runtime Isolation</a:t>
+            </a:r>
+            <a:endParaRPr lang="en-US" sz="1200" dirty="0"/>
+          </a:p>
+        </p:txBody>
+      </p:sp>
+      <p:sp>
+        <p:nvSpPr>
+          <p:cNvPr id="7" name="Shape 5"/>
+          <p:cNvSpPr/>
+          <p:nvPr/>
+        </p:nvSpPr>
+        <p:spPr>
+          <a:xfrm>
+            <a:off x="594360" y="1207008"/>
+            <a:ext cx="4892040" cy="1243584"/>
+          </a:xfrm>
+          <a:prstGeom prst="roundRect">
+            <a:avLst>
+              <a:gd name="adj" fmla="val 4412"/>
+            </a:avLst>
+          </a:prstGeom>
+          <a:solidFill>
+            <a:srgbClr val="FFFFFF"/>
+          </a:solidFill>
+          <a:ln w="10160">
+            <a:solidFill>
+              <a:srgbClr val="CBD5E1"/>
+            </a:solidFill>
+            <a:prstDash val="solid"/>
+          </a:ln>
+          <a:effectLst>
+            <a:outerShdw blurRad="19050" dist="12700" dir="2700000" algn="bl" rotWithShape="0">
+              <a:srgbClr val="000000">
+                <a:alpha val="10000"/>
+              </a:srgbClr>
+            </a:outerShdw>
+          </a:effectLst>
+        </p:spPr>
+      </p:sp>
+      <p:sp>
+        <p:nvSpPr>
+          <p:cNvPr id="8" name="Shape 6"/>
+          <p:cNvSpPr/>
+          <p:nvPr/>
+        </p:nvSpPr>
+        <p:spPr>
+          <a:xfrm>
+            <a:off x="594360" y="1207008"/>
+            <a:ext cx="73152" cy="1243584"/>
+          </a:xfrm>
+          <a:prstGeom prst="rect">
+            <a:avLst/>
+          </a:prstGeom>
+          <a:solidFill>
+            <a:srgbClr val="00A896"/>
+          </a:solidFill>
+          <a:ln w="12700">
+            <a:solidFill>
+              <a:srgbClr val="00A896"/>
+            </a:solidFill>
+            <a:prstDash val="solid"/>
+          </a:ln>
+        </p:spPr>
+      </p:sp>
+      <p:sp>
+        <p:nvSpPr>
+          <p:cNvPr id="9" name="Text 7"/>
+          <p:cNvSpPr/>
+          <p:nvPr/>
+        </p:nvSpPr>
+        <p:spPr>
+          <a:xfrm>
+            <a:off x="795528" y="1353312"/>
+            <a:ext cx="4572000" cy="201168"/>
+          </a:xfrm>
+          <a:prstGeom prst="rect">
+            <a:avLst/>
+          </a:prstGeom>
+          <a:noFill/>
+          <a:ln/>
+        </p:spPr>
+        <p:txBody>
+          <a:bodyPr wrap="square" lIns="0" tIns="0" rIns="0" bIns="0" rtlCol="0" anchor="ctr">
+            <a:normAutofit/>
+          </a:bodyPr>
+          <a:lstStyle/>
+          <a:p>
+            <a:pPr marL="0" indent="0">
+              <a:buNone/>
+            </a:pPr>
+            <a:r>
+              <a:t>Protected use case</a:t>
+            </a:r>
+            <a:endParaRPr lang="en-US" sz="1300" dirty="0"/>
+          </a:p>
+        </p:txBody>
+      </p:sp>
+      <p:sp>
+        <p:nvSpPr>
+          <p:cNvPr id="10" name="Text 8"/>
+          <p:cNvSpPr/>
+          <p:nvPr/>
+        </p:nvSpPr>
+        <p:spPr>
+          <a:xfrm>
+            <a:off x="795528" y="1645920"/>
+            <a:ext cx="4581144" cy="713232"/>
+          </a:xfrm>
+          <a:prstGeom prst="rect">
+            <a:avLst/>
+          </a:prstGeom>
+          <a:noFill/>
+          <a:ln/>
+        </p:spPr>
+        <p:txBody>
+          <a:bodyPr wrap="square" lIns="254" tIns="254" rIns="254" bIns="254" rtlCol="0" anchor="t">
+            <a:normAutofit/>
+          </a:bodyPr>
+          <a:lstStyle/>
+          <a:p>
+            <a:pPr marL="0" indent="0">
+              <a:buNone/>
+            </a:pPr>
+            <a:r>
+              <a:t>A mission node must run only platform services on the bare host (init, sshd, auditd, time, container manager). Every mission workload and every operator session lands inside a container by default.</a:t>
+            </a:r>
+            <a:endParaRPr lang="en-US" sz="1200" dirty="0"/>
+          </a:p>
+        </p:txBody>
+      </p:sp>
+      <p:sp>
+        <p:nvSpPr>
+          <p:cNvPr id="11" name="Shape 9"/>
+          <p:cNvSpPr/>
+          <p:nvPr/>
+        </p:nvSpPr>
+        <p:spPr>
+          <a:xfrm>
+            <a:off x="594360" y="2697480"/>
+            <a:ext cx="4892040" cy="1243584"/>
+          </a:xfrm>
+          <a:prstGeom prst="roundRect">
+            <a:avLst>
+              <a:gd name="adj" fmla="val 4412"/>
+            </a:avLst>
+          </a:prstGeom>
+          <a:solidFill>
+            <a:srgbClr val="FFFFFF"/>
+          </a:solidFill>
+          <a:ln w="10160">
+            <a:solidFill>
+              <a:srgbClr val="CBD5E1"/>
+            </a:solidFill>
+            <a:prstDash val="solid"/>
+          </a:ln>
+          <a:effectLst>
+            <a:outerShdw blurRad="19050" dist="12700" dir="2700000" algn="bl" rotWithShape="0">
+              <a:srgbClr val="000000">
+                <a:alpha val="10000"/>
+              </a:srgbClr>
+            </a:outerShdw>
+          </a:effectLst>
+        </p:spPr>
+      </p:sp>
+      <p:sp>
+        <p:nvSpPr>
+          <p:cNvPr id="12" name="Shape 10"/>
+          <p:cNvSpPr/>
+          <p:nvPr/>
+        </p:nvSpPr>
+        <p:spPr>
+          <a:xfrm>
+            <a:off x="594360" y="2697480"/>
+            <a:ext cx="73152" cy="1243584"/>
+          </a:xfrm>
+          <a:prstGeom prst="rect">
+            <a:avLst/>
+          </a:prstGeom>
+          <a:solidFill>
+            <a:srgbClr val="E11D48"/>
+          </a:solidFill>
+          <a:ln w="12700">
+            <a:solidFill>
+              <a:srgbClr val="E11D48"/>
+            </a:solidFill>
+            <a:prstDash val="solid"/>
+          </a:ln>
+        </p:spPr>
+      </p:sp>
+      <p:sp>
+        <p:nvSpPr>
+          <p:cNvPr id="13" name="Text 11"/>
+          <p:cNvSpPr/>
+          <p:nvPr/>
+        </p:nvSpPr>
+        <p:spPr>
+          <a:xfrm>
+            <a:off x="795528" y="2843784"/>
+            <a:ext cx="4572000" cy="201168"/>
+          </a:xfrm>
+          <a:prstGeom prst="rect">
+            <a:avLst/>
+          </a:prstGeom>
+          <a:noFill/>
+          <a:ln/>
+        </p:spPr>
+        <p:txBody>
+          <a:bodyPr wrap="square" lIns="0" tIns="0" rIns="0" bIns="0" rtlCol="0" anchor="ctr">
+            <a:normAutofit/>
+          </a:bodyPr>
+          <a:lstStyle/>
+          <a:p>
+            <a:pPr marL="0" indent="0">
+              <a:buNone/>
+            </a:pPr>
+            <a:r>
+              <a:t>Threat / failure mode</a:t>
+            </a:r>
+            <a:endParaRPr lang="en-US" sz="1300" dirty="0"/>
+          </a:p>
+        </p:txBody>
+      </p:sp>
+      <p:sp>
+        <p:nvSpPr>
+          <p:cNvPr id="14" name="Text 12"/>
+          <p:cNvSpPr/>
+          <p:nvPr/>
+        </p:nvSpPr>
+        <p:spPr>
+          <a:xfrm>
+            <a:off x="795528" y="3136392"/>
+            <a:ext cx="4581144" cy="713232"/>
+          </a:xfrm>
+          <a:prstGeom prst="rect">
+            <a:avLst/>
+          </a:prstGeom>
+          <a:noFill/>
+          <a:ln/>
+        </p:spPr>
+        <p:txBody>
+          <a:bodyPr wrap="square" lIns="254" tIns="254" rIns="254" bIns="254" rtlCol="0" anchor="t">
+            <a:normAutofit/>
+          </a:bodyPr>
+          <a:lstStyle/>
+          <a:p>
+            <a:pPr marL="0" indent="0">
+              <a:buNone/>
+            </a:pPr>
+            <a:r>
+              <a:t>Operator shell on host root, lateral movement between co-resident services, service compromise reaching kernel APIs, undisciplined per-service hardening drift, post-install software introduction outside the release pipeline.</a:t>
+            </a:r>
+            <a:endParaRPr lang="en-US" sz="1200" dirty="0"/>
+          </a:p>
+        </p:txBody>
+      </p:sp>
+      <p:sp>
+        <p:nvSpPr>
+          <p:cNvPr id="15" name="Shape 13"/>
+          <p:cNvSpPr/>
+          <p:nvPr/>
+        </p:nvSpPr>
+        <p:spPr>
+          <a:xfrm>
+            <a:off x="5742432" y="1207008"/>
+            <a:ext cx="5833872" cy="2734056"/>
+          </a:xfrm>
+          <a:prstGeom prst="roundRect">
+            <a:avLst>
+              <a:gd name="adj" fmla="val 2007"/>
+            </a:avLst>
+          </a:prstGeom>
+          <a:solidFill>
+            <a:srgbClr val="FFFFFF"/>
+          </a:solidFill>
+          <a:ln w="10160">
+            <a:solidFill>
+              <a:srgbClr val="CBD5E1"/>
+            </a:solidFill>
+            <a:prstDash val="solid"/>
+          </a:ln>
+          <a:effectLst>
+            <a:outerShdw blurRad="19050" dist="12700" dir="2700000" algn="bl" rotWithShape="0">
+              <a:srgbClr val="000000">
+                <a:alpha val="10000"/>
+              </a:srgbClr>
+            </a:outerShdw>
+          </a:effectLst>
+        </p:spPr>
+      </p:sp>
+      <p:sp>
+        <p:nvSpPr>
+          <p:cNvPr id="16" name="Shape 14"/>
+          <p:cNvSpPr/>
+          <p:nvPr/>
+        </p:nvSpPr>
+        <p:spPr>
+          <a:xfrm>
+            <a:off x="5742432" y="1207008"/>
+            <a:ext cx="73152" cy="2734056"/>
+          </a:xfrm>
+          <a:prstGeom prst="rect">
+            <a:avLst/>
+          </a:prstGeom>
+          <a:solidFill>
+            <a:srgbClr val="00A896"/>
+          </a:solidFill>
+          <a:ln w="12700">
+            <a:solidFill>
+              <a:srgbClr val="00A896"/>
+            </a:solidFill>
+            <a:prstDash val="solid"/>
+          </a:ln>
+        </p:spPr>
+      </p:sp>
+      <p:sp>
+        <p:nvSpPr>
+          <p:cNvPr id="17" name="Text 15"/>
+          <p:cNvSpPr/>
+          <p:nvPr/>
+        </p:nvSpPr>
+        <p:spPr>
+          <a:xfrm>
+            <a:off x="5943600" y="1353312"/>
+            <a:ext cx="5513832" cy="201168"/>
+          </a:xfrm>
+          <a:prstGeom prst="rect">
+            <a:avLst/>
+          </a:prstGeom>
+          <a:noFill/>
+          <a:ln/>
+        </p:spPr>
+        <p:txBody>
+          <a:bodyPr wrap="square" lIns="0" tIns="0" rIns="0" bIns="0" rtlCol="0" anchor="ctr">
+            <a:normAutofit/>
+          </a:bodyPr>
+          <a:lstStyle/>
+          <a:p>
+            <a:pPr marL="0" indent="0">
+              <a:buNone/>
+            </a:pPr>
+            <a:r>
+              <a:t>Technical implementation details</a:t>
+            </a:r>
+            <a:endParaRPr lang="en-US" sz="1300" dirty="0"/>
+          </a:p>
+        </p:txBody>
+      </p:sp>
+      <p:sp>
+        <p:nvSpPr>
+          <p:cNvPr id="18" name="Text 16"/>
+          <p:cNvSpPr/>
+          <p:nvPr/>
+        </p:nvSpPr>
+        <p:spPr>
+          <a:xfrm>
+            <a:off x="5943600" y="1645920"/>
+            <a:ext cx="5522976" cy="2203704"/>
+          </a:xfrm>
+          <a:prstGeom prst="rect">
+            <a:avLst/>
+          </a:prstGeom>
+          <a:noFill/>
+          <a:ln/>
+        </p:spPr>
+        <p:txBody>
+          <a:bodyPr wrap="square" lIns="254" tIns="254" rIns="254" bIns="254" rtlCol="0" anchor="t">
+            <a:normAutofit/>
+          </a:bodyPr>
+          <a:lstStyle/>
+          <a:p>
+            <a:pPr marL="0" indent="0">
+              <a:buNone/>
+            </a:pPr>
+            <a:r>
+              <a:t>- Boot the host with only systemd, sshd, auditd, chrony, and lxc/incus/nspawn.</a:t>
+            </a:r>
+            <a:endParaRPr lang="en-US" sz="1200" dirty="0"/>
+          </a:p>
+          <a:p>
+            <a:pPr marL="0" indent="0">
+              <a:buNone/>
+            </a:pPr>
+            <a:endParaRPr lang="en-US" sz="1200" dirty="0"/>
+          </a:p>
+          <a:p>
+            <a:pPr marL="0" indent="0">
+              <a:buNone/>
+            </a:pPr>
+            <a:endParaRPr lang="en-US" sz="1200" dirty="0"/>
+          </a:p>
+          <a:p>
+            <a:pPr marL="0" indent="0">
+              <a:buNone/>
+            </a:pPr>
+            <a:endParaRPr lang="en-US" sz="1200" dirty="0"/>
+          </a:p>
+          <a:p>
+            <a:pPr marL="0" indent="0">
+              <a:buNone/>
+            </a:pPr>
+            <a:endParaRPr lang="en-US" sz="1200" dirty="0"/>
+          </a:p>
+          <a:p>
+            <a:pPr marL="0" indent="0">
+              <a:buNone/>
+            </a:pPr>
+            <a:endParaRPr lang="en-US" sz="1200" dirty="0"/>
+          </a:p>
+        </p:txBody>
+      </p:sp>
+      <p:sp>
+        <p:nvSpPr>
+          <p:cNvPr id="19" name="Shape 17"/>
+          <p:cNvSpPr/>
+          <p:nvPr/>
+        </p:nvSpPr>
+        <p:spPr>
+          <a:xfrm>
+            <a:off x="594360" y="4041648"/>
+            <a:ext cx="3566160" cy="1060704"/>
+          </a:xfrm>
+          <a:prstGeom prst="roundRect">
+            <a:avLst>
+              <a:gd name="adj" fmla="val 5172"/>
+            </a:avLst>
+          </a:prstGeom>
+          <a:solidFill>
+            <a:srgbClr val="FFFFFF"/>
+          </a:solidFill>
+          <a:ln w="10160">
+            <a:solidFill>
+              <a:srgbClr val="CBD5E1"/>
+            </a:solidFill>
+            <a:prstDash val="solid"/>
+          </a:ln>
+        </p:spPr>
+      </p:sp>
+      <p:sp>
+        <p:nvSpPr>
+          <p:cNvPr id="20" name="Shape 18"/>
+          <p:cNvSpPr/>
+          <p:nvPr/>
+        </p:nvSpPr>
+        <p:spPr>
+          <a:xfrm>
+            <a:off x="594360" y="4041648"/>
+            <a:ext cx="73152" cy="1060704"/>
+          </a:xfrm>
+          <a:prstGeom prst="rect">
+            <a:avLst/>
+          </a:prstGeom>
+          <a:solidFill>
+            <a:srgbClr val="F59E0B"/>
+          </a:solidFill>
+          <a:ln w="12700">
+            <a:solidFill>
+              <a:srgbClr val="F59E0B"/>
+            </a:solidFill>
+            <a:prstDash val="solid"/>
+          </a:ln>
+        </p:spPr>
+      </p:sp>
+      <p:sp>
+        <p:nvSpPr>
+          <p:cNvPr id="21" name="Text 19"/>
+          <p:cNvSpPr/>
+          <p:nvPr/>
+        </p:nvSpPr>
+        <p:spPr>
+          <a:xfrm>
+            <a:off x="795528" y="4187952"/>
+            <a:ext cx="3246120" cy="201168"/>
+          </a:xfrm>
+          <a:prstGeom prst="rect">
+            <a:avLst/>
+          </a:prstGeom>
+          <a:noFill/>
+          <a:ln/>
+        </p:spPr>
+        <p:txBody>
+          <a:bodyPr wrap="square" lIns="0" tIns="0" rIns="0" bIns="0" rtlCol="0" anchor="ctr">
+            <a:normAutofit/>
+          </a:bodyPr>
+          <a:lstStyle/>
+          <a:p>
+            <a:pPr marL="0" indent="0">
+              <a:buNone/>
+            </a:pPr>
+            <a:r>
+              <a:t>Performance</a:t>
+            </a:r>
+            <a:endParaRPr lang="en-US" sz="1200" dirty="0"/>
+          </a:p>
+        </p:txBody>
+      </p:sp>
+      <p:sp>
+        <p:nvSpPr>
+          <p:cNvPr id="22" name="Text 20"/>
+          <p:cNvSpPr/>
+          <p:nvPr/>
+        </p:nvSpPr>
+        <p:spPr>
+          <a:xfrm>
+            <a:off x="795528" y="4480560"/>
+            <a:ext cx="3255264" cy="530352"/>
+          </a:xfrm>
+          <a:prstGeom prst="rect">
+            <a:avLst/>
+          </a:prstGeom>
+          <a:noFill/>
+          <a:ln/>
+        </p:spPr>
+        <p:txBody>
+          <a:bodyPr wrap="square" lIns="254" tIns="254" rIns="254" bIns="254" rtlCol="0" anchor="t">
+            <a:normAutofit/>
+          </a:bodyPr>
+          <a:lstStyle/>
+          <a:p>
+            <a:pPr marL="0" indent="0">
+              <a:buNone/>
+            </a:pPr>
+            <a:r>
+              <a:t>Userns idmap and overlayfs add small file-op overhead; benchmark per M31. No hypervisor cost — shared kernel.</a:t>
+            </a:r>
+            <a:endParaRPr lang="en-US" sz="1200" dirty="0"/>
+          </a:p>
+        </p:txBody>
+      </p:sp>
+      <p:sp>
+        <p:nvSpPr>
+          <p:cNvPr id="23" name="Shape 21"/>
+          <p:cNvSpPr/>
+          <p:nvPr/>
+        </p:nvSpPr>
+        <p:spPr>
+          <a:xfrm>
+            <a:off x="4315968" y="4041648"/>
+            <a:ext cx="3566160" cy="1060704"/>
+          </a:xfrm>
+          <a:prstGeom prst="roundRect">
+            <a:avLst>
+              <a:gd name="adj" fmla="val 5172"/>
+            </a:avLst>
+          </a:prstGeom>
+          <a:solidFill>
+            <a:srgbClr val="FFFFFF"/>
+          </a:solidFill>
+          <a:ln w="10160">
+            <a:solidFill>
+              <a:srgbClr val="CBD5E1"/>
+            </a:solidFill>
+            <a:prstDash val="solid"/>
+          </a:ln>
+        </p:spPr>
+      </p:sp>
+      <p:sp>
+        <p:nvSpPr>
+          <p:cNvPr id="24" name="Shape 22"/>
+          <p:cNvSpPr/>
+          <p:nvPr/>
+        </p:nvSpPr>
+        <p:spPr>
+          <a:xfrm>
+            <a:off x="4315968" y="4041648"/>
+            <a:ext cx="73152" cy="1060704"/>
+          </a:xfrm>
+          <a:prstGeom prst="rect">
+            <a:avLst/>
+          </a:prstGeom>
+          <a:solidFill>
+            <a:srgbClr val="00A896"/>
+          </a:solidFill>
+          <a:ln w="12700">
+            <a:solidFill>
+              <a:srgbClr val="00A896"/>
+            </a:solidFill>
+            <a:prstDash val="solid"/>
+          </a:ln>
+        </p:spPr>
+      </p:sp>
+      <p:sp>
+        <p:nvSpPr>
+          <p:cNvPr id="25" name="Text 23"/>
+          <p:cNvSpPr/>
+          <p:nvPr/>
+        </p:nvSpPr>
+        <p:spPr>
+          <a:xfrm>
+            <a:off x="4517136" y="4187952"/>
+            <a:ext cx="3246120" cy="201168"/>
+          </a:xfrm>
+          <a:prstGeom prst="rect">
+            <a:avLst/>
+          </a:prstGeom>
+          <a:noFill/>
+          <a:ln/>
+        </p:spPr>
+        <p:txBody>
+          <a:bodyPr wrap="square" lIns="0" tIns="0" rIns="0" bIns="0" rtlCol="0" anchor="ctr">
+            <a:normAutofit/>
+          </a:bodyPr>
+          <a:lstStyle/>
+          <a:p>
+            <a:pPr marL="0" indent="0">
+              <a:buNone/>
+            </a:pPr>
+            <a:r>
+              <a:t>Air-gap note</a:t>
+            </a:r>
+            <a:endParaRPr lang="en-US" sz="1200" dirty="0"/>
+          </a:p>
+        </p:txBody>
+      </p:sp>
+      <p:sp>
+        <p:nvSpPr>
+          <p:cNvPr id="26" name="Text 24"/>
+          <p:cNvSpPr/>
+          <p:nvPr/>
+        </p:nvSpPr>
+        <p:spPr>
+          <a:xfrm>
+            <a:off x="4517136" y="4480560"/>
+            <a:ext cx="3255264" cy="530352"/>
+          </a:xfrm>
+          <a:prstGeom prst="rect">
+            <a:avLst/>
+          </a:prstGeom>
+          <a:noFill/>
+          <a:ln/>
+        </p:spPr>
+        <p:txBody>
+          <a:bodyPr wrap="square" lIns="254" tIns="254" rIns="254" bIns="254" rtlCol="0" anchor="t">
+            <a:normAutofit/>
+          </a:bodyPr>
+          <a:lstStyle/>
+          <a:p>
+            <a:pPr marL="0" indent="0">
+              <a:buNone/>
+            </a:pPr>
+            <a:r>
+              <a:t>Container rootfs is a signed tarball, not a registry image. Fits the existing M16/M28/M30 pipeline with no Docker/registry footprint.</a:t>
+            </a:r>
+            <a:endParaRPr lang="en-US" sz="1200" dirty="0"/>
+          </a:p>
+        </p:txBody>
+      </p:sp>
+      <p:sp>
+        <p:nvSpPr>
+          <p:cNvPr id="27" name="Shape 25"/>
+          <p:cNvSpPr/>
+          <p:nvPr/>
+        </p:nvSpPr>
+        <p:spPr>
+          <a:xfrm>
+            <a:off x="8028432" y="4041648"/>
+            <a:ext cx="3566160" cy="1060704"/>
+          </a:xfrm>
+          <a:prstGeom prst="roundRect">
+            <a:avLst>
+              <a:gd name="adj" fmla="val 5172"/>
+            </a:avLst>
+          </a:prstGeom>
+          <a:solidFill>
+            <a:srgbClr val="FFFFFF"/>
+          </a:solidFill>
+          <a:ln w="10160">
+            <a:solidFill>
+              <a:srgbClr val="CBD5E1"/>
+            </a:solidFill>
+            <a:prstDash val="solid"/>
+          </a:ln>
+        </p:spPr>
+      </p:sp>
+      <p:sp>
+        <p:nvSpPr>
+          <p:cNvPr id="28" name="Shape 26"/>
+          <p:cNvSpPr/>
+          <p:nvPr/>
+        </p:nvSpPr>
+        <p:spPr>
+          <a:xfrm>
+            <a:off x="8028432" y="4041648"/>
+            <a:ext cx="73152" cy="1060704"/>
+          </a:xfrm>
+          <a:prstGeom prst="rect">
+            <a:avLst/>
+          </a:prstGeom>
+          <a:solidFill>
+            <a:srgbClr val="E11D48"/>
+          </a:solidFill>
+          <a:ln w="12700">
+            <a:solidFill>
+              <a:srgbClr val="E11D48"/>
+            </a:solidFill>
+            <a:prstDash val="solid"/>
+          </a:ln>
+        </p:spPr>
+      </p:sp>
+      <p:sp>
+        <p:nvSpPr>
+          <p:cNvPr id="29" name="Text 27"/>
+          <p:cNvSpPr/>
+          <p:nvPr/>
+        </p:nvSpPr>
+        <p:spPr>
+          <a:xfrm>
+            <a:off x="8229600" y="4187952"/>
+            <a:ext cx="3246120" cy="201168"/>
+          </a:xfrm>
+          <a:prstGeom prst="rect">
+            <a:avLst/>
+          </a:prstGeom>
+          <a:noFill/>
+          <a:ln/>
+        </p:spPr>
+        <p:txBody>
+          <a:bodyPr wrap="square" lIns="0" tIns="0" rIns="0" bIns="0" rtlCol="0" anchor="ctr">
+            <a:normAutofit/>
+          </a:bodyPr>
+          <a:lstStyle/>
+          <a:p>
+            <a:pPr marL="0" indent="0">
+              <a:buNone/>
+            </a:pPr>
+            <a:r>
+              <a:t>Operational caveat</a:t>
+            </a:r>
+            <a:endParaRPr lang="en-US" sz="1200" dirty="0"/>
+          </a:p>
+        </p:txBody>
+      </p:sp>
+      <p:sp>
+        <p:nvSpPr>
+          <p:cNvPr id="30" name="Text 28"/>
+          <p:cNvSpPr/>
+          <p:nvPr/>
+        </p:nvSpPr>
+        <p:spPr>
+          <a:xfrm>
+            <a:off x="8229600" y="4480560"/>
+            <a:ext cx="3255264" cy="530352"/>
+          </a:xfrm>
+          <a:prstGeom prst="rect">
+            <a:avLst/>
+          </a:prstGeom>
+          <a:noFill/>
+          <a:ln/>
+        </p:spPr>
+        <p:txBody>
+          <a:bodyPr wrap="square" lIns="254" tIns="254" rIns="254" bIns="254" rtlCol="0" anchor="t">
+            <a:normAutofit/>
+          </a:bodyPr>
+          <a:lstStyle/>
+          <a:p>
+            <a:pPr marL="0" indent="0">
+              <a:buNone/>
+            </a:pPr>
+            <a:r>
+              <a:t>Shared kernel — a kernel-LPE CVE crosses the boundary. For high-assurance workloads, layer Kata/gVisor or KVM under LXC. Misconfigured privileged container is worse than none.</a:t>
+            </a:r>
+            <a:endParaRPr lang="en-US" sz="1200" dirty="0"/>
+          </a:p>
+        </p:txBody>
+      </p:sp>
+      <p:sp>
+        <p:nvSpPr>
+          <p:cNvPr id="31" name="Shape 29"/>
+          <p:cNvSpPr/>
+          <p:nvPr/>
+        </p:nvSpPr>
+        <p:spPr>
+          <a:xfrm>
+            <a:off x="594360" y="5468112"/>
+            <a:ext cx="11000232" cy="585216"/>
+          </a:xfrm>
+          <a:prstGeom prst="roundRect">
+            <a:avLst>
+              <a:gd name="adj" fmla="val 6250"/>
+            </a:avLst>
+          </a:prstGeom>
+          <a:solidFill>
+            <a:srgbClr val="111827"/>
+          </a:solidFill>
+          <a:ln w="12700">
+            <a:solidFill>
+              <a:srgbClr val="111827"/>
+            </a:solidFill>
+            <a:prstDash val="solid"/>
+          </a:ln>
+        </p:spPr>
+      </p:sp>
+      <p:sp>
+        <p:nvSpPr>
+          <p:cNvPr id="32" name="Text 30"/>
+          <p:cNvSpPr/>
+          <p:nvPr/>
+        </p:nvSpPr>
+        <p:spPr>
+          <a:xfrm>
+            <a:off x="822960" y="5650992"/>
+            <a:ext cx="10533888" cy="128016"/>
+          </a:xfrm>
+          <a:prstGeom prst="rect">
+            <a:avLst/>
+          </a:prstGeom>
+          <a:noFill/>
+          <a:ln/>
+        </p:spPr>
+        <p:txBody>
+          <a:bodyPr wrap="square" lIns="0" tIns="0" rIns="0" bIns="0" rtlCol="0" anchor="ctr">
+            <a:normAutofit/>
+          </a:bodyPr>
+          <a:lstStyle/>
+          <a:p>
+            <a:pPr marL="0" indent="0">
+              <a:buNone/>
+            </a:pPr>
+            <a:r>
+              <a:t>Validation: lxc-checkconfig, systemd-analyze security &lt;unit&gt;, verify userns mapping with `cat /proc/&lt;pid&gt;/uid_map`, attempt host shell from operator account (must fail), negative tests on capability and syscall denial inside the container.</a:t>
+            </a:r>
+            <a:endParaRPr lang="en-US" sz="1200" dirty="0"/>
+          </a:p>
+        </p:txBody>
+      </p:sp>
+      <p:sp>
+        <p:nvSpPr>
+          <p:cNvPr id="33" name="Text 31"/>
+          <p:cNvSpPr/>
+          <p:nvPr/>
+        </p:nvSpPr>
+        <p:spPr>
+          <a:xfrm>
+            <a:off x="502920" y="6537960"/>
+            <a:ext cx="6400800" cy="164592"/>
+          </a:xfrm>
+          <a:prstGeom prst="rect">
+            <a:avLst/>
+          </a:prstGeom>
+          <a:noFill/>
+          <a:ln/>
+        </p:spPr>
+        <p:txBody>
+          <a:bodyPr wrap="square" lIns="0" tIns="0" rIns="0" bIns="0" rtlCol="0" anchor="ctr"/>
+          <a:lstStyle/>
+          <a:p>
+            <a:pPr marL="0" indent="0">
+              <a:buNone/>
+            </a:pPr>
+            <a:r>
+              <a:t>Appliance pattern (extension)</a:t>
+            </a:r>
+            <a:endParaRPr lang="en-US" sz="1200" dirty="0"/>
+          </a:p>
+        </p:txBody>
+      </p:sp>
+      <p:sp>
+        <p:nvSpPr>
+          <p:cNvPr id="34" name="Text 32"/>
+          <p:cNvSpPr/>
+          <p:nvPr/>
+        </p:nvSpPr>
+        <p:spPr>
+          <a:xfrm>
+            <a:off x="8046720" y="6537960"/>
+            <a:ext cx="3840480" cy="164592"/>
+          </a:xfrm>
+          <a:prstGeom prst="rect">
+            <a:avLst/>
+          </a:prstGeom>
+          <a:noFill/>
+          <a:ln/>
+        </p:spPr>
+        <p:txBody>
+          <a:bodyPr wrap="square" lIns="0" tIns="0" rIns="0" bIns="0" rtlCol="0" anchor="ctr"/>
+          <a:lstStyle/>
+          <a:p>
+            <a:pPr marL="0" indent="0" algn="r">
+              <a:buNone/>
+            </a:pPr>
+            <a:r>
+              <a:t>Linux hardening for air-gapped mission systems</a:t>
+            </a:r>
+            <a:endParaRPr lang="en-US" sz="1200" dirty="0"/>
+          </a:p>
+        </p:txBody>
+      </p:sp>
+      <p:pic>
+        <p:nvPicPr>
+          <p:cNvPr id="35" name="Picture 34" descr="fam_runtime.png"/>
+          <p:cNvPicPr>
+            <a:picLocks noChangeAspect="1"/>
+          </p:cNvPicPr>
+          <p:nvPr/>
+        </p:nvPicPr>
+        <p:blipFill>
+          <a:blip/>
+          <a:stretch>
+            <a:fillRect/>
+          </a:stretch>
+        </p:blipFill>
+        <p:spPr>
+          <a:xfrm>
+            <a:off x="10835640" y="566928"/>
+            <a:ext cx="868680" cy="868680"/>
+          </a:xfrm>
+          <a:prstGeom prst="rect">
+            <a:avLst/>
+          </a:prstGeom>
+        </p:spPr>
+      </p:pic>
+    </p:spTree>
+  </p:cSld>
+  <p:clrMapOvr>
+    <a:masterClrMapping/>
+  </p:clrMapOvr>
+</p:sld>
+</file>
+
+<file path=ppt/slides/slide44.xml><?xml version="1.0" encoding="utf-8"?>
 <p:sld xmlns:a="http://schemas.openxmlformats.org/drawingml/2006/main" xmlns:r="http://schemas.openxmlformats.org/officeDocument/2006/relationships" xmlns:p="http://schemas.openxmlformats.org/presentationml/2006/main">
   <p:cSld name="Slide 43">
     <p:bg>
@@ -47733,7 +49333,7 @@
 </p:sld>
 </file>
 
-<file path=ppt/slides/slide44.xml><?xml version="1.0" encoding="utf-8"?>
+<file path=ppt/slides/slide45.xml><?xml version="1.0" encoding="utf-8"?>
 <p:sld xmlns:a="http://schemas.openxmlformats.org/drawingml/2006/main" xmlns:r="http://schemas.openxmlformats.org/officeDocument/2006/relationships" xmlns:p="http://schemas.openxmlformats.org/presentationml/2006/main">
   <p:cSld name="Slide 44">
     <p:bg>
@@ -49582,30 +51182,6 @@
           </a:p>
         </p:txBody>
       </p:sp>
-      <p:pic>
-        <p:nvPicPr>
-          <p:cNvPr id="55" name="Picture 54" descr="fam_governance.png"/>
-          <p:cNvPicPr>
-            <a:picLocks noChangeAspect="1"/>
-          </p:cNvPicPr>
-          <p:nvPr/>
-        </p:nvPicPr>
-        <p:blipFill>
-          <a:blip r:embed="rId3"/>
-          <a:stretch>
-            <a:fillRect/>
-          </a:stretch>
-        </p:blipFill>
-        <p:spPr>
-          <a:xfrm>
-            <a:off x="10927080" y="164592"/>
-            <a:ext cx="777240" cy="777240"/>
-          </a:xfrm>
-          <a:prstGeom prst="rect">
-            <a:avLst/>
-          </a:prstGeom>
-        </p:spPr>
-      </p:pic>
     </p:spTree>
   </p:cSld>
   <p:clrMapOvr>
@@ -49614,7 +51190,7 @@
 </p:sld>
 </file>
 
-<file path=ppt/slides/slide45.xml><?xml version="1.0" encoding="utf-8"?>
+<file path=ppt/slides/slide46.xml><?xml version="1.0" encoding="utf-8"?>
 <p:sld xmlns:a="http://schemas.openxmlformats.org/drawingml/2006/main" xmlns:r="http://schemas.openxmlformats.org/officeDocument/2006/relationships" xmlns:p="http://schemas.openxmlformats.org/presentationml/2006/main">
   <p:cSld name="Slide 45">
     <p:bg>
@@ -51194,30 +52770,6 @@
           </a:p>
         </p:txBody>
       </p:sp>
-      <p:pic>
-        <p:nvPicPr>
-          <p:cNvPr id="47" name="Picture 46" descr="fam_governance.png"/>
-          <p:cNvPicPr>
-            <a:picLocks noChangeAspect="1"/>
-          </p:cNvPicPr>
-          <p:nvPr/>
-        </p:nvPicPr>
-        <p:blipFill>
-          <a:blip r:embed="rId3"/>
-          <a:stretch>
-            <a:fillRect/>
-          </a:stretch>
-        </p:blipFill>
-        <p:spPr>
-          <a:xfrm>
-            <a:off x="10927080" y="164592"/>
-            <a:ext cx="777240" cy="777240"/>
-          </a:xfrm>
-          <a:prstGeom prst="rect">
-            <a:avLst/>
-          </a:prstGeom>
-        </p:spPr>
-      </p:pic>
     </p:spTree>
   </p:cSld>
   <p:clrMapOvr>
